--- a/material/[SeSAC_YDP_6] 04_2_Javascript.pptx
+++ b/material/[SeSAC_YDP_6] 04_2_Javascript.pptx
@@ -25,7 +25,7 @@
     <p:sldId id="400" r:id="rId16"/>
     <p:sldId id="702" r:id="rId17"/>
     <p:sldId id="401" r:id="rId18"/>
-    <p:sldId id="402" r:id="rId19"/>
+    <p:sldId id="706" r:id="rId19"/>
     <p:sldId id="403" r:id="rId20"/>
     <p:sldId id="404" r:id="rId21"/>
     <p:sldId id="362" r:id="rId22"/>
@@ -36,7 +36,7 @@
     <p:sldId id="408" r:id="rId27"/>
     <p:sldId id="363" r:id="rId28"/>
     <p:sldId id="364" r:id="rId29"/>
-    <p:sldId id="409" r:id="rId30"/>
+    <p:sldId id="705" r:id="rId30"/>
     <p:sldId id="360" r:id="rId31"/>
     <p:sldId id="358" r:id="rId32"/>
     <p:sldId id="410" r:id="rId33"/>
@@ -1036,14 +1036,6 @@
           <a:bodyPr/>
           <a:lstStyle/>
           <a:p>
-            <a:r>
-              <a:rPr lang="ko-KR" altLang="en-US" dirty="0"/>
-              <a:t>실습</a:t>
-            </a:r>
-            <a:r>
-              <a:rPr lang="en-US" altLang="ko-KR" dirty="0"/>
-              <a:t>.</a:t>
-            </a:r>
             <a:endParaRPr lang="ko-KR" altLang="en-US" dirty="0"/>
           </a:p>
         </p:txBody>
@@ -1074,7 +1066,7 @@
     </p:spTree>
     <p:extLst>
       <p:ext uri="{BB962C8B-B14F-4D97-AF65-F5344CB8AC3E}">
-        <p14:creationId xmlns:p14="http://schemas.microsoft.com/office/powerpoint/2010/main" val="1657665223"/>
+        <p14:creationId xmlns:p14="http://schemas.microsoft.com/office/powerpoint/2010/main" val="2669359416"/>
       </p:ext>
     </p:extLst>
   </p:cSld>
@@ -2376,47 +2368,7 @@
           <a:bodyPr/>
           <a:lstStyle/>
           <a:p>
-            <a:r>
-              <a:rPr lang="ko-KR" altLang="en-US" dirty="0" err="1"/>
-              <a:t>형변환</a:t>
-            </a:r>
-            <a:r>
-              <a:rPr lang="ko-KR" altLang="en-US" dirty="0"/>
-              <a:t> 실습 해볼까요</a:t>
-            </a:r>
-            <a:r>
-              <a:rPr lang="en-US" altLang="ko-KR" dirty="0"/>
-              <a:t>?</a:t>
-            </a:r>
-          </a:p>
-          <a:p>
-            <a:endParaRPr lang="en-US" altLang="ko-KR" dirty="0"/>
-          </a:p>
-          <a:p>
-            <a:r>
-              <a:rPr lang="en-US" altLang="ko-KR" dirty="0"/>
-              <a:t>//</a:t>
-            </a:r>
-            <a:r>
-              <a:rPr lang="ko-KR" altLang="en-US" dirty="0"/>
-              <a:t> 실습 </a:t>
-            </a:r>
-            <a:r>
-              <a:rPr lang="en-US" altLang="ko-KR" dirty="0"/>
-              <a:t>&gt; </a:t>
-            </a:r>
-            <a:r>
-              <a:rPr lang="ko-KR" altLang="en-US" dirty="0"/>
-              <a:t>이해 핑 </a:t>
-            </a:r>
-            <a:r>
-              <a:rPr lang="en-US" altLang="ko-KR" dirty="0"/>
-              <a:t>&gt; </a:t>
-            </a:r>
-            <a:r>
-              <a:rPr lang="ko-KR" altLang="en-US" dirty="0"/>
-              <a:t>다음페이지</a:t>
-            </a:r>
+            <a:endParaRPr lang="ko-KR" altLang="en-US" dirty="0"/>
           </a:p>
         </p:txBody>
       </p:sp>
@@ -2446,7 +2398,7 @@
     </p:spTree>
     <p:extLst>
       <p:ext uri="{BB962C8B-B14F-4D97-AF65-F5344CB8AC3E}">
-        <p14:creationId xmlns:p14="http://schemas.microsoft.com/office/powerpoint/2010/main" val="4219785976"/>
+        <p14:creationId xmlns:p14="http://schemas.microsoft.com/office/powerpoint/2010/main" val="242147536"/>
       </p:ext>
     </p:extLst>
   </p:cSld>
@@ -12144,7 +12096,13 @@
       </p:grpSpPr>
       <p:sp>
         <p:nvSpPr>
-          <p:cNvPr id="2" name="내용 개체 틀 1"/>
+          <p:cNvPr id="13" name="내용 개체 틀 2">
+            <a:extLst>
+              <a:ext uri="{FF2B5EF4-FFF2-40B4-BE49-F238E27FC236}">
+                <a16:creationId xmlns:a16="http://schemas.microsoft.com/office/drawing/2014/main" id="{847FD532-7F61-A001-537F-B970BD821AF3}"/>
+              </a:ext>
+            </a:extLst>
+          </p:cNvPr>
           <p:cNvSpPr>
             <a:spLocks noGrp="1"/>
           </p:cNvSpPr>
@@ -12152,63 +12110,55 @@
             <p:ph idx="1"/>
           </p:nvPr>
         </p:nvSpPr>
+        <p:spPr>
+          <a:xfrm>
+            <a:off x="510988" y="1328391"/>
+            <a:ext cx="11260802" cy="5328442"/>
+          </a:xfrm>
+        </p:spPr>
+        <p:txBody>
+          <a:bodyPr>
+            <a:normAutofit/>
+          </a:bodyPr>
+          <a:lstStyle/>
+          <a:p>
+            <a:endParaRPr lang="en-US" altLang="ko-KR" dirty="0"/>
+          </a:p>
+          <a:p>
+            <a:pPr marL="0" indent="0">
+              <a:buNone/>
+            </a:pPr>
+            <a:endParaRPr lang="en-US" altLang="ko-KR" dirty="0"/>
+          </a:p>
+          <a:p>
+            <a:endParaRPr lang="en-US" altLang="ko-KR" dirty="0"/>
+          </a:p>
+        </p:txBody>
+      </p:sp>
+      <p:sp>
+        <p:nvSpPr>
+          <p:cNvPr id="4" name="날짜 개체 틀 3">
+            <a:extLst>
+              <a:ext uri="{FF2B5EF4-FFF2-40B4-BE49-F238E27FC236}">
+                <a16:creationId xmlns:a16="http://schemas.microsoft.com/office/drawing/2014/main" id="{A695DDE5-0A39-A366-4CFE-A283911999CD}"/>
+              </a:ext>
+            </a:extLst>
+          </p:cNvPr>
+          <p:cNvSpPr>
+            <a:spLocks noGrp="1"/>
+          </p:cNvSpPr>
+          <p:nvPr>
+            <p:ph type="dt" sz="half" idx="10"/>
+          </p:nvPr>
+        </p:nvSpPr>
         <p:spPr/>
         <p:txBody>
           <a:bodyPr/>
           <a:lstStyle/>
           <a:p>
-            <a:r>
-              <a:rPr lang="ko-KR" altLang="en-US" dirty="0"/>
-              <a:t>각자를 소개할 수 있는 </a:t>
-            </a:r>
-            <a:r>
-              <a:rPr lang="en-US" altLang="ko-KR" dirty="0"/>
-              <a:t>Object </a:t>
-            </a:r>
-            <a:r>
-              <a:rPr lang="ko-KR" altLang="en-US" dirty="0"/>
-              <a:t>형태의 변수 선언</a:t>
-            </a:r>
-          </a:p>
-          <a:p>
-            <a:r>
-              <a:rPr lang="ko-KR" altLang="en-US" dirty="0"/>
-              <a:t>지금 까지 배운 데이터를 사용하여 자신을 소개하는 </a:t>
-            </a:r>
-            <a:r>
-              <a:rPr lang="en-US" altLang="ko-KR" dirty="0"/>
-              <a:t>console.log </a:t>
-            </a:r>
-            <a:r>
-              <a:rPr lang="ko-KR" altLang="en-US" dirty="0"/>
-              <a:t>출력</a:t>
-            </a:r>
-            <a:r>
-              <a:rPr lang="en-US" altLang="ko-KR" dirty="0"/>
-              <a:t>!</a:t>
-            </a:r>
-            <a:endParaRPr lang="ko-KR" altLang="en-US" dirty="0"/>
-          </a:p>
-        </p:txBody>
-      </p:sp>
-      <p:sp>
-        <p:nvSpPr>
-          <p:cNvPr id="3" name="날짜 개체 틀 2"/>
-          <p:cNvSpPr>
-            <a:spLocks noGrp="1"/>
-          </p:cNvSpPr>
-          <p:nvPr>
-            <p:ph type="dt" sz="half" idx="10"/>
-          </p:nvPr>
-        </p:nvSpPr>
-        <p:spPr/>
-        <p:txBody>
-          <a:bodyPr/>
-          <a:lstStyle/>
-          <a:p>
-            <a:fld id="{3C9CE3CE-253F-4F9D-BA15-C226C8D8501E}" type="datetime6">
+            <a:fld id="{0F78D9C4-20C1-4B15-A116-16DC77AD9A1E}" type="datetime1">
               <a:rPr lang="ko-KR" altLang="en-US" smtClean="0"/>
-              <a:t>2024년 5월</a:t>
+              <a:t>2024-05-27</a:t>
             </a:fld>
             <a:endParaRPr lang="ko-KR" altLang="en-US"/>
           </a:p>
@@ -12216,7 +12166,13 @@
       </p:sp>
       <p:sp>
         <p:nvSpPr>
-          <p:cNvPr id="4" name="슬라이드 번호 개체 틀 3"/>
+          <p:cNvPr id="5" name="슬라이드 번호 개체 틀 4">
+            <a:extLst>
+              <a:ext uri="{FF2B5EF4-FFF2-40B4-BE49-F238E27FC236}">
+                <a16:creationId xmlns:a16="http://schemas.microsoft.com/office/drawing/2014/main" id="{5E040F43-60A7-C50D-1F5B-F984054F2D7C}"/>
+              </a:ext>
+            </a:extLst>
+          </p:cNvPr>
           <p:cNvSpPr>
             <a:spLocks noGrp="1"/>
           </p:cNvSpPr>
@@ -12239,84 +12195,476 @@
       </p:sp>
       <p:sp>
         <p:nvSpPr>
-          <p:cNvPr id="5" name="제목 4"/>
-          <p:cNvSpPr>
-            <a:spLocks noGrp="1"/>
-          </p:cNvSpPr>
-          <p:nvPr>
-            <p:ph type="title"/>
-          </p:nvPr>
-        </p:nvSpPr>
-        <p:spPr/>
-        <p:txBody>
-          <a:bodyPr/>
-          <a:lstStyle/>
-          <a:p>
-            <a:r>
-              <a:rPr lang="ko-KR" altLang="en-US" dirty="0">
-                <a:solidFill>
-                  <a:srgbClr val="6EC173"/>
-                </a:solidFill>
-              </a:rPr>
-              <a:t>실습</a:t>
-            </a:r>
-            <a:r>
-              <a:rPr lang="en-US" altLang="ko-KR" dirty="0">
-                <a:solidFill>
-                  <a:srgbClr val="6EC173"/>
-                </a:solidFill>
-              </a:rPr>
-              <a:t>. </a:t>
-            </a:r>
-            <a:r>
-              <a:rPr lang="en-US" altLang="ko-KR" dirty="0"/>
-              <a:t>JavaScript </a:t>
-            </a:r>
-            <a:r>
-              <a:rPr lang="ko-KR" altLang="en-US" dirty="0" err="1"/>
-              <a:t>자료형</a:t>
-            </a:r>
-            <a:r>
-              <a:rPr lang="ko-KR" altLang="en-US" dirty="0"/>
-              <a:t> 연습하기</a:t>
-            </a:r>
-          </a:p>
-        </p:txBody>
-      </p:sp>
-      <p:pic>
-        <p:nvPicPr>
-          <p:cNvPr id="8" name="그림 7">
+          <p:cNvPr id="2" name="제목 1">
             <a:extLst>
               <a:ext uri="{FF2B5EF4-FFF2-40B4-BE49-F238E27FC236}">
-                <a16:creationId xmlns:a16="http://schemas.microsoft.com/office/drawing/2014/main" id="{13504DB4-6713-6491-CB76-C27CEA840133}"/>
+                <a16:creationId xmlns:a16="http://schemas.microsoft.com/office/drawing/2014/main" id="{5FAC57F5-99D7-9C46-B6C1-D16224151FE9}"/>
               </a:ext>
             </a:extLst>
           </p:cNvPr>
-          <p:cNvPicPr>
-            <a:picLocks noChangeAspect="1"/>
-          </p:cNvPicPr>
+          <p:cNvSpPr>
+            <a:spLocks noGrp="1"/>
+          </p:cNvSpPr>
+          <p:nvPr>
+            <p:ph type="title"/>
+          </p:nvPr>
+        </p:nvSpPr>
+        <p:spPr/>
+        <p:txBody>
+          <a:bodyPr/>
+          <a:lstStyle/>
+          <a:p>
+            <a:r>
+              <a:rPr lang="ko-KR" altLang="en-US" dirty="0">
+                <a:solidFill>
+                  <a:srgbClr val="6EC173"/>
+                </a:solidFill>
+              </a:rPr>
+              <a:t>실습</a:t>
+            </a:r>
+            <a:r>
+              <a:rPr lang="en-US" altLang="ko-KR" dirty="0">
+                <a:solidFill>
+                  <a:srgbClr val="6EC173"/>
+                </a:solidFill>
+              </a:rPr>
+              <a:t>. </a:t>
+            </a:r>
+            <a:r>
+              <a:rPr lang="ko-KR" altLang="en-US" dirty="0" err="1"/>
+              <a:t>형변환</a:t>
+            </a:r>
+            <a:r>
+              <a:rPr lang="en-US" altLang="ko-KR" dirty="0"/>
+              <a:t> </a:t>
+            </a:r>
+            <a:r>
+              <a:rPr lang="ko-KR" altLang="en-US" dirty="0"/>
+              <a:t>실습</a:t>
+            </a:r>
+          </a:p>
+        </p:txBody>
+      </p:sp>
+      <p:sp>
+        <p:nvSpPr>
+          <p:cNvPr id="6" name="내용 개체 틀 1">
+            <a:extLst>
+              <a:ext uri="{FF2B5EF4-FFF2-40B4-BE49-F238E27FC236}">
+                <a16:creationId xmlns:a16="http://schemas.microsoft.com/office/drawing/2014/main" id="{70C2BA37-BE91-39C4-AC08-0E8A1052E2F7}"/>
+              </a:ext>
+            </a:extLst>
+          </p:cNvPr>
+          <p:cNvSpPr txBox="1">
+            <a:spLocks/>
+          </p:cNvSpPr>
           <p:nvPr/>
-        </p:nvPicPr>
-        <p:blipFill>
-          <a:blip r:embed="rId3"/>
-          <a:stretch>
-            <a:fillRect/>
-          </a:stretch>
-        </p:blipFill>
+        </p:nvSpPr>
         <p:spPr>
           <a:xfrm>
-            <a:off x="2387150" y="3818095"/>
-            <a:ext cx="6133763" cy="1575135"/>
+            <a:off x="838200" y="1825625"/>
+            <a:ext cx="10515600" cy="4351338"/>
           </a:xfrm>
           <a:prstGeom prst="rect">
             <a:avLst/>
           </a:prstGeom>
         </p:spPr>
-      </p:pic>
+        <p:txBody>
+          <a:bodyPr vert="horz" lIns="91440" tIns="45720" rIns="91440" bIns="45720" rtlCol="0">
+            <a:normAutofit/>
+          </a:bodyPr>
+          <a:lstStyle>
+            <a:lvl1pPr marL="228600" indent="-228600" algn="l" defTabSz="914400" rtl="0" eaLnBrk="1" latinLnBrk="1" hangingPunct="1">
+              <a:lnSpc>
+                <a:spcPct val="90000"/>
+              </a:lnSpc>
+              <a:spcBef>
+                <a:spcPts val="1000"/>
+              </a:spcBef>
+              <a:buFont typeface="Arial" panose="020B0604020202020204" pitchFamily="34" charset="0"/>
+              <a:buChar char="•"/>
+              <a:defRPr sz="2800" kern="1200">
+                <a:solidFill>
+                  <a:schemeClr val="tx1"/>
+                </a:solidFill>
+                <a:latin typeface="+mn-lt"/>
+                <a:ea typeface="+mn-ea"/>
+                <a:cs typeface="+mn-cs"/>
+              </a:defRPr>
+            </a:lvl1pPr>
+            <a:lvl2pPr marL="685800" indent="-228600" algn="l" defTabSz="914400" rtl="0" eaLnBrk="1" latinLnBrk="1" hangingPunct="1">
+              <a:lnSpc>
+                <a:spcPct val="90000"/>
+              </a:lnSpc>
+              <a:spcBef>
+                <a:spcPts val="500"/>
+              </a:spcBef>
+              <a:buFont typeface="Arial" panose="020B0604020202020204" pitchFamily="34" charset="0"/>
+              <a:buChar char="•"/>
+              <a:defRPr sz="2400" kern="1200">
+                <a:solidFill>
+                  <a:schemeClr val="tx1"/>
+                </a:solidFill>
+                <a:latin typeface="+mn-lt"/>
+                <a:ea typeface="+mn-ea"/>
+                <a:cs typeface="+mn-cs"/>
+              </a:defRPr>
+            </a:lvl2pPr>
+            <a:lvl3pPr marL="1143000" indent="-228600" algn="l" defTabSz="914400" rtl="0" eaLnBrk="1" latinLnBrk="1" hangingPunct="1">
+              <a:lnSpc>
+                <a:spcPct val="90000"/>
+              </a:lnSpc>
+              <a:spcBef>
+                <a:spcPts val="500"/>
+              </a:spcBef>
+              <a:buFont typeface="Arial" panose="020B0604020202020204" pitchFamily="34" charset="0"/>
+              <a:buChar char="•"/>
+              <a:defRPr sz="2000" kern="1200">
+                <a:solidFill>
+                  <a:schemeClr val="tx1"/>
+                </a:solidFill>
+                <a:latin typeface="+mn-lt"/>
+                <a:ea typeface="+mn-ea"/>
+                <a:cs typeface="+mn-cs"/>
+              </a:defRPr>
+            </a:lvl3pPr>
+            <a:lvl4pPr marL="1600200" indent="-228600" algn="l" defTabSz="914400" rtl="0" eaLnBrk="1" latinLnBrk="1" hangingPunct="1">
+              <a:lnSpc>
+                <a:spcPct val="90000"/>
+              </a:lnSpc>
+              <a:spcBef>
+                <a:spcPts val="500"/>
+              </a:spcBef>
+              <a:buFont typeface="Arial" panose="020B0604020202020204" pitchFamily="34" charset="0"/>
+              <a:buChar char="•"/>
+              <a:defRPr sz="1800" kern="1200">
+                <a:solidFill>
+                  <a:schemeClr val="tx1"/>
+                </a:solidFill>
+                <a:latin typeface="+mn-lt"/>
+                <a:ea typeface="+mn-ea"/>
+                <a:cs typeface="+mn-cs"/>
+              </a:defRPr>
+            </a:lvl4pPr>
+            <a:lvl5pPr marL="2057400" indent="-228600" algn="l" defTabSz="914400" rtl="0" eaLnBrk="1" latinLnBrk="1" hangingPunct="1">
+              <a:lnSpc>
+                <a:spcPct val="90000"/>
+              </a:lnSpc>
+              <a:spcBef>
+                <a:spcPts val="500"/>
+              </a:spcBef>
+              <a:buFont typeface="Arial" panose="020B0604020202020204" pitchFamily="34" charset="0"/>
+              <a:buChar char="•"/>
+              <a:defRPr sz="1800" kern="1200">
+                <a:solidFill>
+                  <a:schemeClr val="tx1"/>
+                </a:solidFill>
+                <a:latin typeface="+mn-lt"/>
+                <a:ea typeface="+mn-ea"/>
+                <a:cs typeface="+mn-cs"/>
+              </a:defRPr>
+            </a:lvl5pPr>
+            <a:lvl6pPr marL="2514600" indent="-228600" algn="l" defTabSz="914400" rtl="0" eaLnBrk="1" latinLnBrk="1" hangingPunct="1">
+              <a:lnSpc>
+                <a:spcPct val="90000"/>
+              </a:lnSpc>
+              <a:spcBef>
+                <a:spcPts val="500"/>
+              </a:spcBef>
+              <a:buFont typeface="Arial" panose="020B0604020202020204" pitchFamily="34" charset="0"/>
+              <a:buChar char="•"/>
+              <a:defRPr sz="1800" kern="1200">
+                <a:solidFill>
+                  <a:schemeClr val="tx1"/>
+                </a:solidFill>
+                <a:latin typeface="+mn-lt"/>
+                <a:ea typeface="+mn-ea"/>
+                <a:cs typeface="+mn-cs"/>
+              </a:defRPr>
+            </a:lvl6pPr>
+            <a:lvl7pPr marL="2971800" indent="-228600" algn="l" defTabSz="914400" rtl="0" eaLnBrk="1" latinLnBrk="1" hangingPunct="1">
+              <a:lnSpc>
+                <a:spcPct val="90000"/>
+              </a:lnSpc>
+              <a:spcBef>
+                <a:spcPts val="500"/>
+              </a:spcBef>
+              <a:buFont typeface="Arial" panose="020B0604020202020204" pitchFamily="34" charset="0"/>
+              <a:buChar char="•"/>
+              <a:defRPr sz="1800" kern="1200">
+                <a:solidFill>
+                  <a:schemeClr val="tx1"/>
+                </a:solidFill>
+                <a:latin typeface="+mn-lt"/>
+                <a:ea typeface="+mn-ea"/>
+                <a:cs typeface="+mn-cs"/>
+              </a:defRPr>
+            </a:lvl7pPr>
+            <a:lvl8pPr marL="3429000" indent="-228600" algn="l" defTabSz="914400" rtl="0" eaLnBrk="1" latinLnBrk="1" hangingPunct="1">
+              <a:lnSpc>
+                <a:spcPct val="90000"/>
+              </a:lnSpc>
+              <a:spcBef>
+                <a:spcPts val="500"/>
+              </a:spcBef>
+              <a:buFont typeface="Arial" panose="020B0604020202020204" pitchFamily="34" charset="0"/>
+              <a:buChar char="•"/>
+              <a:defRPr sz="1800" kern="1200">
+                <a:solidFill>
+                  <a:schemeClr val="tx1"/>
+                </a:solidFill>
+                <a:latin typeface="+mn-lt"/>
+                <a:ea typeface="+mn-ea"/>
+                <a:cs typeface="+mn-cs"/>
+              </a:defRPr>
+            </a:lvl8pPr>
+            <a:lvl9pPr marL="3886200" indent="-228600" algn="l" defTabSz="914400" rtl="0" eaLnBrk="1" latinLnBrk="1" hangingPunct="1">
+              <a:lnSpc>
+                <a:spcPct val="90000"/>
+              </a:lnSpc>
+              <a:spcBef>
+                <a:spcPts val="500"/>
+              </a:spcBef>
+              <a:buFont typeface="Arial" panose="020B0604020202020204" pitchFamily="34" charset="0"/>
+              <a:buChar char="•"/>
+              <a:defRPr sz="1800" kern="1200">
+                <a:solidFill>
+                  <a:schemeClr val="tx1"/>
+                </a:solidFill>
+                <a:latin typeface="+mn-lt"/>
+                <a:ea typeface="+mn-ea"/>
+                <a:cs typeface="+mn-cs"/>
+              </a:defRPr>
+            </a:lvl9pPr>
+          </a:lstStyle>
+          <a:p>
+            <a:pPr marL="457200" lvl="1" indent="0">
+              <a:buFont typeface="Arial" panose="020B0604020202020204" pitchFamily="34" charset="0"/>
+              <a:buNone/>
+            </a:pPr>
+            <a:endParaRPr lang="en-US" altLang="ko-KR" dirty="0">
+              <a:solidFill>
+                <a:srgbClr val="212529"/>
+              </a:solidFill>
+              <a:latin typeface="+mn-ea"/>
+            </a:endParaRPr>
+          </a:p>
+          <a:p>
+            <a:pPr marL="457200" lvl="1" indent="0">
+              <a:buFont typeface="Arial" panose="020B0604020202020204" pitchFamily="34" charset="0"/>
+              <a:buNone/>
+            </a:pPr>
+            <a:endParaRPr lang="en-US" altLang="ko-KR" dirty="0">
+              <a:solidFill>
+                <a:srgbClr val="212529"/>
+              </a:solidFill>
+              <a:latin typeface="+mn-ea"/>
+            </a:endParaRPr>
+          </a:p>
+          <a:p>
+            <a:r>
+              <a:rPr lang="en-US" altLang="ko-KR" b="1" dirty="0">
+                <a:solidFill>
+                  <a:srgbClr val="212529"/>
+                </a:solidFill>
+                <a:latin typeface="+mn-ea"/>
+              </a:rPr>
+              <a:t>[</a:t>
+            </a:r>
+            <a:r>
+              <a:rPr lang="ko-KR" altLang="en-US" b="1" dirty="0" err="1">
+                <a:solidFill>
+                  <a:srgbClr val="212529"/>
+                </a:solidFill>
+                <a:latin typeface="+mn-ea"/>
+              </a:rPr>
+              <a:t>코딩온</a:t>
+            </a:r>
+            <a:r>
+              <a:rPr lang="en-US" altLang="ko-KR" b="1" dirty="0">
+                <a:solidFill>
+                  <a:srgbClr val="212529"/>
+                </a:solidFill>
+                <a:latin typeface="+mn-ea"/>
+              </a:rPr>
+              <a:t>] HTML, CSS, JS </a:t>
+            </a:r>
+            <a:r>
+              <a:rPr lang="ko-KR" altLang="en-US" b="1" dirty="0">
+                <a:solidFill>
+                  <a:srgbClr val="212529"/>
+                </a:solidFill>
+                <a:latin typeface="+mn-ea"/>
+              </a:rPr>
+              <a:t>실습</a:t>
+            </a:r>
+            <a:r>
+              <a:rPr lang="en-US" altLang="ko-KR" b="1" dirty="0">
+                <a:solidFill>
+                  <a:srgbClr val="212529"/>
+                </a:solidFill>
+                <a:latin typeface="+mn-ea"/>
+              </a:rPr>
+              <a:t> </a:t>
+            </a:r>
+            <a:r>
+              <a:rPr lang="ko-KR" altLang="en-US" dirty="0">
+                <a:solidFill>
+                  <a:srgbClr val="212529"/>
+                </a:solidFill>
+                <a:latin typeface="+mn-ea"/>
+              </a:rPr>
+              <a:t>강의 클릭</a:t>
+            </a:r>
+            <a:br>
+              <a:rPr lang="en-US" altLang="ko-KR" dirty="0">
+                <a:solidFill>
+                  <a:srgbClr val="212529"/>
+                </a:solidFill>
+                <a:latin typeface="+mn-ea"/>
+              </a:rPr>
+            </a:br>
+            <a:endParaRPr lang="en-US" altLang="ko-KR" dirty="0">
+              <a:solidFill>
+                <a:srgbClr val="212529"/>
+              </a:solidFill>
+              <a:latin typeface="+mn-ea"/>
+            </a:endParaRPr>
+          </a:p>
+          <a:p>
+            <a:pPr lvl="1"/>
+            <a:r>
+              <a:rPr lang="ko-KR" altLang="en-US" sz="2800" b="1" dirty="0">
+                <a:solidFill>
+                  <a:srgbClr val="212529"/>
+                </a:solidFill>
+                <a:latin typeface="+mn-ea"/>
+              </a:rPr>
+              <a:t>➡ </a:t>
+            </a:r>
+            <a:r>
+              <a:rPr lang="en-US" altLang="ko-KR" sz="2800" b="1" dirty="0">
+                <a:solidFill>
+                  <a:srgbClr val="212529"/>
+                </a:solidFill>
+                <a:latin typeface="+mn-ea"/>
+              </a:rPr>
+              <a:t>[JS</a:t>
+            </a:r>
+            <a:r>
+              <a:rPr lang="ko-KR" altLang="en-US" sz="2800" b="1" dirty="0">
+                <a:solidFill>
+                  <a:srgbClr val="212529"/>
+                </a:solidFill>
+                <a:latin typeface="+mn-ea"/>
+              </a:rPr>
+              <a:t> 자료형 실습</a:t>
+            </a:r>
+            <a:r>
+              <a:rPr lang="en-US" altLang="ko-KR" sz="2800" b="1" dirty="0">
+                <a:solidFill>
+                  <a:srgbClr val="212529"/>
+                </a:solidFill>
+                <a:latin typeface="+mn-ea"/>
+              </a:rPr>
+              <a:t>]</a:t>
+            </a:r>
+            <a:r>
+              <a:rPr lang="en-US" altLang="ko-KR" sz="2800" dirty="0">
+                <a:solidFill>
+                  <a:srgbClr val="212529"/>
+                </a:solidFill>
+                <a:latin typeface="+mn-ea"/>
+              </a:rPr>
+              <a:t> </a:t>
+            </a:r>
+            <a:r>
+              <a:rPr lang="ko-KR" altLang="en-US" sz="2800" dirty="0">
+                <a:solidFill>
+                  <a:srgbClr val="212529"/>
+                </a:solidFill>
+                <a:latin typeface="+mn-ea"/>
+              </a:rPr>
+              <a:t>커리큘럼 클릭</a:t>
+            </a:r>
+            <a:endParaRPr lang="en-US" altLang="ko-KR" sz="2800" dirty="0">
+              <a:solidFill>
+                <a:srgbClr val="212529"/>
+              </a:solidFill>
+              <a:latin typeface="+mn-ea"/>
+            </a:endParaRPr>
+          </a:p>
+          <a:p>
+            <a:pPr lvl="1"/>
+            <a:r>
+              <a:rPr lang="ko-KR" altLang="en-US" sz="2800" b="1" dirty="0">
+                <a:solidFill>
+                  <a:srgbClr val="212529"/>
+                </a:solidFill>
+                <a:latin typeface="+mn-ea"/>
+              </a:rPr>
+              <a:t>➡ </a:t>
+            </a:r>
+            <a:r>
+              <a:rPr lang="en-US" altLang="ko-KR" sz="2800" b="1" dirty="0">
+                <a:solidFill>
+                  <a:schemeClr val="accent1"/>
+                </a:solidFill>
+                <a:latin typeface="+mn-ea"/>
+              </a:rPr>
+              <a:t>[Object </a:t>
+            </a:r>
+            <a:r>
+              <a:rPr lang="ko-KR" altLang="en-US" sz="2800" b="1">
+                <a:solidFill>
+                  <a:schemeClr val="accent1"/>
+                </a:solidFill>
+                <a:latin typeface="+mn-ea"/>
+              </a:rPr>
+              <a:t>변수 선언 </a:t>
+            </a:r>
+            <a:r>
+              <a:rPr lang="ko-KR" altLang="en-US" sz="2800" b="1" dirty="0">
+                <a:solidFill>
+                  <a:schemeClr val="accent1"/>
+                </a:solidFill>
+                <a:latin typeface="+mn-ea"/>
+              </a:rPr>
+              <a:t>실습</a:t>
+            </a:r>
+            <a:r>
+              <a:rPr lang="en-US" altLang="ko-KR" sz="2800" b="1" dirty="0">
+                <a:solidFill>
+                  <a:schemeClr val="accent1"/>
+                </a:solidFill>
+                <a:latin typeface="+mn-ea"/>
+              </a:rPr>
+              <a:t>]</a:t>
+            </a:r>
+            <a:r>
+              <a:rPr lang="en-US" altLang="ko-KR" sz="2800" dirty="0">
+                <a:solidFill>
+                  <a:schemeClr val="accent1"/>
+                </a:solidFill>
+                <a:latin typeface="+mn-ea"/>
+              </a:rPr>
+              <a:t> </a:t>
+            </a:r>
+            <a:r>
+              <a:rPr lang="ko-KR" altLang="en-US" sz="2800" dirty="0">
+                <a:solidFill>
+                  <a:srgbClr val="212529"/>
+                </a:solidFill>
+                <a:latin typeface="+mn-ea"/>
+              </a:rPr>
+              <a:t> 진행</a:t>
+            </a:r>
+          </a:p>
+        </p:txBody>
+      </p:sp>
     </p:spTree>
     <p:extLst>
       <p:ext uri="{BB962C8B-B14F-4D97-AF65-F5344CB8AC3E}">
-        <p14:creationId xmlns:p14="http://schemas.microsoft.com/office/powerpoint/2010/main" val="3108576526"/>
+        <p14:creationId xmlns:p14="http://schemas.microsoft.com/office/powerpoint/2010/main" val="1644176229"/>
       </p:ext>
     </p:extLst>
   </p:cSld>
@@ -13592,6 +13940,26 @@
           <a:lstStyle/>
           <a:p>
             <a:r>
+              <a:rPr lang="ko-KR" altLang="en-US" sz="4400" dirty="0">
+                <a:solidFill>
+                  <a:srgbClr val="6EC173"/>
+                </a:solidFill>
+              </a:rPr>
+              <a:t>실습</a:t>
+            </a:r>
+            <a:r>
+              <a:rPr lang="en-US" altLang="ko-KR" sz="4400" dirty="0">
+                <a:solidFill>
+                  <a:srgbClr val="6EC173"/>
+                </a:solidFill>
+              </a:rPr>
+              <a:t>)</a:t>
+            </a:r>
+            <a:r>
+              <a:rPr lang="en-US" altLang="ko-KR" sz="4400" dirty="0"/>
+              <a:t> </a:t>
+            </a:r>
+            <a:r>
               <a:rPr lang="ko-KR" altLang="en-US" dirty="0"/>
               <a:t>성적 평균 구하는 프로그램 만들기</a:t>
             </a:r>
@@ -13655,14 +14023,6 @@
           </a:bodyPr>
           <a:lstStyle/>
           <a:p>
-            <a:r>
-              <a:rPr lang="ko-KR" altLang="en-US" sz="2800" dirty="0"/>
-              <a:t>깜짝 실습</a:t>
-            </a:r>
-            <a:r>
-              <a:rPr lang="en-US" altLang="ko-KR" sz="2800" dirty="0"/>
-              <a:t>) </a:t>
-            </a:r>
             <a:r>
               <a:rPr lang="ko-KR" altLang="en-US" sz="2800" dirty="0"/>
               <a:t>두 성적의 평균을 구해보세요</a:t>
@@ -15833,10 +16193,10 @@
       </p:grpSpPr>
       <p:sp>
         <p:nvSpPr>
-          <p:cNvPr id="2" name="내용 개체 틀 1">
+          <p:cNvPr id="13" name="내용 개체 틀 2">
             <a:extLst>
               <a:ext uri="{FF2B5EF4-FFF2-40B4-BE49-F238E27FC236}">
-                <a16:creationId xmlns:a16="http://schemas.microsoft.com/office/drawing/2014/main" id="{1CD33C44-EA48-9F21-9021-11097E932260}"/>
+                <a16:creationId xmlns:a16="http://schemas.microsoft.com/office/drawing/2014/main" id="{847FD532-7F61-A001-537F-B970BD821AF3}"/>
               </a:ext>
             </a:extLst>
           </p:cNvPr>
@@ -15847,112 +16207,37 @@
             <p:ph idx="1"/>
           </p:nvPr>
         </p:nvSpPr>
-        <p:spPr/>
-        <p:txBody>
-          <a:bodyPr/>
-          <a:lstStyle/>
-          <a:p>
-            <a:r>
-              <a:rPr lang="ko-KR" altLang="en-US" dirty="0"/>
-              <a:t>변수 </a:t>
-            </a:r>
-            <a:r>
-              <a:rPr lang="en-US" altLang="ko-KR" dirty="0" err="1"/>
-              <a:t>mathScore</a:t>
-            </a:r>
-            <a:r>
-              <a:rPr lang="en-US" altLang="ko-KR" dirty="0"/>
-              <a:t>, </a:t>
-            </a:r>
-            <a:r>
-              <a:rPr lang="en-US" altLang="ko-KR" dirty="0" err="1"/>
-              <a:t>engScore</a:t>
-            </a:r>
-            <a:r>
-              <a:rPr lang="en-US" altLang="ko-KR" dirty="0"/>
-              <a:t> </a:t>
-            </a:r>
-            <a:r>
-              <a:rPr lang="ko-KR" altLang="en-US" dirty="0"/>
-              <a:t>를 만들어 주세요</a:t>
-            </a:r>
-            <a:r>
-              <a:rPr lang="en-US" altLang="ko-KR" dirty="0"/>
-              <a:t>.</a:t>
-            </a:r>
-          </a:p>
-          <a:p>
-            <a:r>
-              <a:rPr lang="en-US" altLang="ko-KR" dirty="0" err="1"/>
-              <a:t>mathScore</a:t>
-            </a:r>
-            <a:r>
-              <a:rPr lang="en-US" altLang="ko-KR" dirty="0"/>
-              <a:t> = “77”; </a:t>
-            </a:r>
-            <a:r>
-              <a:rPr lang="en-US" altLang="ko-KR" dirty="0" err="1"/>
-              <a:t>engScore</a:t>
-            </a:r>
-            <a:r>
-              <a:rPr lang="en-US" altLang="ko-KR" dirty="0"/>
-              <a:t> = “88”;</a:t>
-            </a:r>
-          </a:p>
-          <a:p>
-            <a:r>
-              <a:rPr lang="ko-KR" altLang="en-US" dirty="0"/>
-              <a:t>시험 점수 평균을 계산하여 </a:t>
-            </a:r>
-            <a:r>
-              <a:rPr lang="en-US" altLang="ko-KR" dirty="0" err="1"/>
-              <a:t>avgScore</a:t>
-            </a:r>
-            <a:r>
-              <a:rPr lang="en-US" altLang="ko-KR" dirty="0"/>
-              <a:t> </a:t>
-            </a:r>
-            <a:r>
-              <a:rPr lang="ko-KR" altLang="en-US" dirty="0"/>
-              <a:t>에 저장하고</a:t>
-            </a:r>
-            <a:r>
-              <a:rPr lang="en-US" altLang="ko-KR" dirty="0"/>
-              <a:t>, </a:t>
-            </a:r>
-            <a:r>
-              <a:rPr lang="ko-KR" altLang="en-US" dirty="0"/>
-              <a:t>이를 출력하는 프로그램을 작성하세요</a:t>
-            </a:r>
-            <a:r>
-              <a:rPr lang="en-US" altLang="ko-KR" dirty="0"/>
-              <a:t>!</a:t>
-            </a:r>
-          </a:p>
-          <a:p>
-            <a:r>
-              <a:rPr lang="ko-KR" altLang="en-US" dirty="0"/>
-              <a:t>명시적 형 변환을 사용하여 평균 점수가 정확하게 나와야 합니다</a:t>
-            </a:r>
-            <a:r>
-              <a:rPr lang="en-US" altLang="ko-KR" dirty="0"/>
-              <a:t>!</a:t>
-            </a:r>
-          </a:p>
+        <p:spPr>
+          <a:xfrm>
+            <a:off x="510988" y="1328391"/>
+            <a:ext cx="11260802" cy="5328442"/>
+          </a:xfrm>
+        </p:spPr>
+        <p:txBody>
+          <a:bodyPr>
+            <a:normAutofit/>
+          </a:bodyPr>
+          <a:lstStyle/>
           <a:p>
             <a:endParaRPr lang="en-US" altLang="ko-KR" dirty="0"/>
           </a:p>
           <a:p>
-            <a:endParaRPr lang="ko-KR" altLang="en-US" dirty="0"/>
-          </a:p>
-        </p:txBody>
-      </p:sp>
-      <p:sp>
-        <p:nvSpPr>
-          <p:cNvPr id="3" name="날짜 개체 틀 2">
+            <a:pPr marL="0" indent="0">
+              <a:buNone/>
+            </a:pPr>
+            <a:endParaRPr lang="en-US" altLang="ko-KR" dirty="0"/>
+          </a:p>
+          <a:p>
+            <a:endParaRPr lang="en-US" altLang="ko-KR" dirty="0"/>
+          </a:p>
+        </p:txBody>
+      </p:sp>
+      <p:sp>
+        <p:nvSpPr>
+          <p:cNvPr id="4" name="날짜 개체 틀 3">
             <a:extLst>
               <a:ext uri="{FF2B5EF4-FFF2-40B4-BE49-F238E27FC236}">
-                <a16:creationId xmlns:a16="http://schemas.microsoft.com/office/drawing/2014/main" id="{B74C33E8-D62C-A3CB-C826-589AB5C1A251}"/>
+                <a16:creationId xmlns:a16="http://schemas.microsoft.com/office/drawing/2014/main" id="{A695DDE5-0A39-A366-4CFE-A283911999CD}"/>
               </a:ext>
             </a:extLst>
           </p:cNvPr>
@@ -15968,9 +16253,9 @@
           <a:bodyPr/>
           <a:lstStyle/>
           <a:p>
-            <a:fld id="{3C9CE3CE-253F-4F9D-BA15-C226C8D8501E}" type="datetime6">
+            <a:fld id="{0F78D9C4-20C1-4B15-A116-16DC77AD9A1E}" type="datetime1">
               <a:rPr lang="ko-KR" altLang="en-US" smtClean="0"/>
-              <a:t>2024년 5월</a:t>
+              <a:t>2024-05-27</a:t>
             </a:fld>
             <a:endParaRPr lang="ko-KR" altLang="en-US"/>
           </a:p>
@@ -15978,10 +16263,10 @@
       </p:sp>
       <p:sp>
         <p:nvSpPr>
-          <p:cNvPr id="4" name="슬라이드 번호 개체 틀 3">
+          <p:cNvPr id="5" name="슬라이드 번호 개체 틀 4">
             <a:extLst>
               <a:ext uri="{FF2B5EF4-FFF2-40B4-BE49-F238E27FC236}">
-                <a16:creationId xmlns:a16="http://schemas.microsoft.com/office/drawing/2014/main" id="{798AD599-3B8D-51C9-21E6-FFD4DB5A0FD0}"/>
+                <a16:creationId xmlns:a16="http://schemas.microsoft.com/office/drawing/2014/main" id="{5E040F43-60A7-C50D-1F5B-F984054F2D7C}"/>
               </a:ext>
             </a:extLst>
           </p:cNvPr>
@@ -16007,10 +16292,10 @@
       </p:sp>
       <p:sp>
         <p:nvSpPr>
-          <p:cNvPr id="5" name="제목 4">
+          <p:cNvPr id="2" name="제목 1">
             <a:extLst>
               <a:ext uri="{FF2B5EF4-FFF2-40B4-BE49-F238E27FC236}">
-                <a16:creationId xmlns:a16="http://schemas.microsoft.com/office/drawing/2014/main" id="{FF38D62C-2415-8993-42AC-A840BCC13846}"/>
+                <a16:creationId xmlns:a16="http://schemas.microsoft.com/office/drawing/2014/main" id="{5FAC57F5-99D7-9C46-B6C1-D16224151FE9}"/>
               </a:ext>
             </a:extLst>
           </p:cNvPr>
@@ -16029,7 +16314,7 @@
             <a:r>
               <a:rPr lang="ko-KR" altLang="en-US" dirty="0">
                 <a:solidFill>
-                  <a:schemeClr val="accent1"/>
+                  <a:srgbClr val="6EC173"/>
                 </a:solidFill>
               </a:rPr>
               <a:t>실습</a:t>
@@ -16037,7 +16322,7 @@
             <a:r>
               <a:rPr lang="en-US" altLang="ko-KR" dirty="0">
                 <a:solidFill>
-                  <a:schemeClr val="accent1"/>
+                  <a:srgbClr val="6EC173"/>
                 </a:solidFill>
               </a:rPr>
               <a:t>. </a:t>
@@ -16047,8 +16332,428 @@
               <a:t>형변환</a:t>
             </a:r>
             <a:r>
+              <a:rPr lang="en-US" altLang="ko-KR" dirty="0"/>
+              <a:t> </a:t>
+            </a:r>
+            <a:r>
               <a:rPr lang="ko-KR" altLang="en-US" dirty="0"/>
+              <a:t>실습</a:t>
+            </a:r>
+          </a:p>
+        </p:txBody>
+      </p:sp>
+      <p:sp>
+        <p:nvSpPr>
+          <p:cNvPr id="6" name="내용 개체 틀 1">
+            <a:extLst>
+              <a:ext uri="{FF2B5EF4-FFF2-40B4-BE49-F238E27FC236}">
+                <a16:creationId xmlns:a16="http://schemas.microsoft.com/office/drawing/2014/main" id="{70C2BA37-BE91-39C4-AC08-0E8A1052E2F7}"/>
+              </a:ext>
+            </a:extLst>
+          </p:cNvPr>
+          <p:cNvSpPr txBox="1">
+            <a:spLocks/>
+          </p:cNvSpPr>
+          <p:nvPr/>
+        </p:nvSpPr>
+        <p:spPr>
+          <a:xfrm>
+            <a:off x="838200" y="1825625"/>
+            <a:ext cx="10515600" cy="4351338"/>
+          </a:xfrm>
+          <a:prstGeom prst="rect">
+            <a:avLst/>
+          </a:prstGeom>
+        </p:spPr>
+        <p:txBody>
+          <a:bodyPr vert="horz" lIns="91440" tIns="45720" rIns="91440" bIns="45720" rtlCol="0">
+            <a:normAutofit/>
+          </a:bodyPr>
+          <a:lstStyle>
+            <a:lvl1pPr marL="228600" indent="-228600" algn="l" defTabSz="914400" rtl="0" eaLnBrk="1" latinLnBrk="1" hangingPunct="1">
+              <a:lnSpc>
+                <a:spcPct val="90000"/>
+              </a:lnSpc>
+              <a:spcBef>
+                <a:spcPts val="1000"/>
+              </a:spcBef>
+              <a:buFont typeface="Arial" panose="020B0604020202020204" pitchFamily="34" charset="0"/>
+              <a:buChar char="•"/>
+              <a:defRPr sz="2800" kern="1200">
+                <a:solidFill>
+                  <a:schemeClr val="tx1"/>
+                </a:solidFill>
+                <a:latin typeface="+mn-lt"/>
+                <a:ea typeface="+mn-ea"/>
+                <a:cs typeface="+mn-cs"/>
+              </a:defRPr>
+            </a:lvl1pPr>
+            <a:lvl2pPr marL="685800" indent="-228600" algn="l" defTabSz="914400" rtl="0" eaLnBrk="1" latinLnBrk="1" hangingPunct="1">
+              <a:lnSpc>
+                <a:spcPct val="90000"/>
+              </a:lnSpc>
+              <a:spcBef>
+                <a:spcPts val="500"/>
+              </a:spcBef>
+              <a:buFont typeface="Arial" panose="020B0604020202020204" pitchFamily="34" charset="0"/>
+              <a:buChar char="•"/>
+              <a:defRPr sz="2400" kern="1200">
+                <a:solidFill>
+                  <a:schemeClr val="tx1"/>
+                </a:solidFill>
+                <a:latin typeface="+mn-lt"/>
+                <a:ea typeface="+mn-ea"/>
+                <a:cs typeface="+mn-cs"/>
+              </a:defRPr>
+            </a:lvl2pPr>
+            <a:lvl3pPr marL="1143000" indent="-228600" algn="l" defTabSz="914400" rtl="0" eaLnBrk="1" latinLnBrk="1" hangingPunct="1">
+              <a:lnSpc>
+                <a:spcPct val="90000"/>
+              </a:lnSpc>
+              <a:spcBef>
+                <a:spcPts val="500"/>
+              </a:spcBef>
+              <a:buFont typeface="Arial" panose="020B0604020202020204" pitchFamily="34" charset="0"/>
+              <a:buChar char="•"/>
+              <a:defRPr sz="2000" kern="1200">
+                <a:solidFill>
+                  <a:schemeClr val="tx1"/>
+                </a:solidFill>
+                <a:latin typeface="+mn-lt"/>
+                <a:ea typeface="+mn-ea"/>
+                <a:cs typeface="+mn-cs"/>
+              </a:defRPr>
+            </a:lvl3pPr>
+            <a:lvl4pPr marL="1600200" indent="-228600" algn="l" defTabSz="914400" rtl="0" eaLnBrk="1" latinLnBrk="1" hangingPunct="1">
+              <a:lnSpc>
+                <a:spcPct val="90000"/>
+              </a:lnSpc>
+              <a:spcBef>
+                <a:spcPts val="500"/>
+              </a:spcBef>
+              <a:buFont typeface="Arial" panose="020B0604020202020204" pitchFamily="34" charset="0"/>
+              <a:buChar char="•"/>
+              <a:defRPr sz="1800" kern="1200">
+                <a:solidFill>
+                  <a:schemeClr val="tx1"/>
+                </a:solidFill>
+                <a:latin typeface="+mn-lt"/>
+                <a:ea typeface="+mn-ea"/>
+                <a:cs typeface="+mn-cs"/>
+              </a:defRPr>
+            </a:lvl4pPr>
+            <a:lvl5pPr marL="2057400" indent="-228600" algn="l" defTabSz="914400" rtl="0" eaLnBrk="1" latinLnBrk="1" hangingPunct="1">
+              <a:lnSpc>
+                <a:spcPct val="90000"/>
+              </a:lnSpc>
+              <a:spcBef>
+                <a:spcPts val="500"/>
+              </a:spcBef>
+              <a:buFont typeface="Arial" panose="020B0604020202020204" pitchFamily="34" charset="0"/>
+              <a:buChar char="•"/>
+              <a:defRPr sz="1800" kern="1200">
+                <a:solidFill>
+                  <a:schemeClr val="tx1"/>
+                </a:solidFill>
+                <a:latin typeface="+mn-lt"/>
+                <a:ea typeface="+mn-ea"/>
+                <a:cs typeface="+mn-cs"/>
+              </a:defRPr>
+            </a:lvl5pPr>
+            <a:lvl6pPr marL="2514600" indent="-228600" algn="l" defTabSz="914400" rtl="0" eaLnBrk="1" latinLnBrk="1" hangingPunct="1">
+              <a:lnSpc>
+                <a:spcPct val="90000"/>
+              </a:lnSpc>
+              <a:spcBef>
+                <a:spcPts val="500"/>
+              </a:spcBef>
+              <a:buFont typeface="Arial" panose="020B0604020202020204" pitchFamily="34" charset="0"/>
+              <a:buChar char="•"/>
+              <a:defRPr sz="1800" kern="1200">
+                <a:solidFill>
+                  <a:schemeClr val="tx1"/>
+                </a:solidFill>
+                <a:latin typeface="+mn-lt"/>
+                <a:ea typeface="+mn-ea"/>
+                <a:cs typeface="+mn-cs"/>
+              </a:defRPr>
+            </a:lvl6pPr>
+            <a:lvl7pPr marL="2971800" indent="-228600" algn="l" defTabSz="914400" rtl="0" eaLnBrk="1" latinLnBrk="1" hangingPunct="1">
+              <a:lnSpc>
+                <a:spcPct val="90000"/>
+              </a:lnSpc>
+              <a:spcBef>
+                <a:spcPts val="500"/>
+              </a:spcBef>
+              <a:buFont typeface="Arial" panose="020B0604020202020204" pitchFamily="34" charset="0"/>
+              <a:buChar char="•"/>
+              <a:defRPr sz="1800" kern="1200">
+                <a:solidFill>
+                  <a:schemeClr val="tx1"/>
+                </a:solidFill>
+                <a:latin typeface="+mn-lt"/>
+                <a:ea typeface="+mn-ea"/>
+                <a:cs typeface="+mn-cs"/>
+              </a:defRPr>
+            </a:lvl7pPr>
+            <a:lvl8pPr marL="3429000" indent="-228600" algn="l" defTabSz="914400" rtl="0" eaLnBrk="1" latinLnBrk="1" hangingPunct="1">
+              <a:lnSpc>
+                <a:spcPct val="90000"/>
+              </a:lnSpc>
+              <a:spcBef>
+                <a:spcPts val="500"/>
+              </a:spcBef>
+              <a:buFont typeface="Arial" panose="020B0604020202020204" pitchFamily="34" charset="0"/>
+              <a:buChar char="•"/>
+              <a:defRPr sz="1800" kern="1200">
+                <a:solidFill>
+                  <a:schemeClr val="tx1"/>
+                </a:solidFill>
+                <a:latin typeface="+mn-lt"/>
+                <a:ea typeface="+mn-ea"/>
+                <a:cs typeface="+mn-cs"/>
+              </a:defRPr>
+            </a:lvl8pPr>
+            <a:lvl9pPr marL="3886200" indent="-228600" algn="l" defTabSz="914400" rtl="0" eaLnBrk="1" latinLnBrk="1" hangingPunct="1">
+              <a:lnSpc>
+                <a:spcPct val="90000"/>
+              </a:lnSpc>
+              <a:spcBef>
+                <a:spcPts val="500"/>
+              </a:spcBef>
+              <a:buFont typeface="Arial" panose="020B0604020202020204" pitchFamily="34" charset="0"/>
+              <a:buChar char="•"/>
+              <a:defRPr sz="1800" kern="1200">
+                <a:solidFill>
+                  <a:schemeClr val="tx1"/>
+                </a:solidFill>
+                <a:latin typeface="+mn-lt"/>
+                <a:ea typeface="+mn-ea"/>
+                <a:cs typeface="+mn-cs"/>
+              </a:defRPr>
+            </a:lvl9pPr>
+          </a:lstStyle>
+          <a:p>
+            <a:pPr marL="457200" lvl="1" indent="0">
+              <a:buFont typeface="Arial" panose="020B0604020202020204" pitchFamily="34" charset="0"/>
+              <a:buNone/>
+            </a:pPr>
+            <a:endParaRPr lang="en-US" altLang="ko-KR" dirty="0">
+              <a:solidFill>
+                <a:srgbClr val="212529"/>
+              </a:solidFill>
+              <a:latin typeface="+mn-ea"/>
+            </a:endParaRPr>
+          </a:p>
+          <a:p>
+            <a:pPr marL="457200" lvl="1" indent="0">
+              <a:buFont typeface="Arial" panose="020B0604020202020204" pitchFamily="34" charset="0"/>
+              <a:buNone/>
+            </a:pPr>
+            <a:endParaRPr lang="en-US" altLang="ko-KR" dirty="0">
+              <a:solidFill>
+                <a:srgbClr val="212529"/>
+              </a:solidFill>
+              <a:latin typeface="+mn-ea"/>
+            </a:endParaRPr>
+          </a:p>
+          <a:p>
+            <a:r>
+              <a:rPr lang="en-US" altLang="ko-KR" b="1" dirty="0">
+                <a:solidFill>
+                  <a:srgbClr val="212529"/>
+                </a:solidFill>
+                <a:latin typeface="+mn-ea"/>
+              </a:rPr>
+              <a:t>[</a:t>
+            </a:r>
+            <a:r>
+              <a:rPr lang="ko-KR" altLang="en-US" b="1" dirty="0" err="1">
+                <a:solidFill>
+                  <a:srgbClr val="212529"/>
+                </a:solidFill>
+                <a:latin typeface="+mn-ea"/>
+              </a:rPr>
+              <a:t>코딩온</a:t>
+            </a:r>
+            <a:r>
+              <a:rPr lang="en-US" altLang="ko-KR" b="1" dirty="0">
+                <a:solidFill>
+                  <a:srgbClr val="212529"/>
+                </a:solidFill>
+                <a:latin typeface="+mn-ea"/>
+              </a:rPr>
+              <a:t>] HTML, CSS, JS </a:t>
+            </a:r>
+            <a:r>
+              <a:rPr lang="ko-KR" altLang="en-US" b="1" dirty="0">
+                <a:solidFill>
+                  <a:srgbClr val="212529"/>
+                </a:solidFill>
+                <a:latin typeface="+mn-ea"/>
+              </a:rPr>
+              <a:t>실습</a:t>
+            </a:r>
+            <a:r>
+              <a:rPr lang="en-US" altLang="ko-KR" b="1" dirty="0">
+                <a:solidFill>
+                  <a:srgbClr val="212529"/>
+                </a:solidFill>
+                <a:latin typeface="+mn-ea"/>
+              </a:rPr>
+              <a:t> </a:t>
+            </a:r>
+            <a:r>
+              <a:rPr lang="ko-KR" altLang="en-US" dirty="0">
+                <a:solidFill>
+                  <a:srgbClr val="212529"/>
+                </a:solidFill>
+                <a:latin typeface="+mn-ea"/>
+              </a:rPr>
+              <a:t>강의 클릭</a:t>
+            </a:r>
+            <a:br>
+              <a:rPr lang="en-US" altLang="ko-KR" dirty="0">
+                <a:solidFill>
+                  <a:srgbClr val="212529"/>
+                </a:solidFill>
+                <a:latin typeface="+mn-ea"/>
+              </a:rPr>
+            </a:br>
+            <a:endParaRPr lang="en-US" altLang="ko-KR" dirty="0">
+              <a:solidFill>
+                <a:srgbClr val="212529"/>
+              </a:solidFill>
+              <a:latin typeface="+mn-ea"/>
+            </a:endParaRPr>
+          </a:p>
+          <a:p>
+            <a:pPr lvl="1"/>
+            <a:r>
+              <a:rPr lang="ko-KR" altLang="en-US" sz="2800" b="1" dirty="0">
+                <a:solidFill>
+                  <a:srgbClr val="212529"/>
+                </a:solidFill>
+                <a:latin typeface="+mn-ea"/>
+              </a:rPr>
+              <a:t>➡ </a:t>
+            </a:r>
+            <a:r>
+              <a:rPr lang="en-US" altLang="ko-KR" sz="2800" b="1" dirty="0">
+                <a:solidFill>
+                  <a:srgbClr val="212529"/>
+                </a:solidFill>
+                <a:latin typeface="+mn-ea"/>
+              </a:rPr>
+              <a:t>[JS</a:t>
+            </a:r>
+            <a:r>
+              <a:rPr lang="ko-KR" altLang="en-US" sz="2800" b="1" dirty="0">
+                <a:solidFill>
+                  <a:srgbClr val="212529"/>
+                </a:solidFill>
+                <a:latin typeface="+mn-ea"/>
+              </a:rPr>
+              <a:t> 자료형 실습</a:t>
+            </a:r>
+            <a:r>
+              <a:rPr lang="en-US" altLang="ko-KR" sz="2800" b="1" dirty="0">
+                <a:solidFill>
+                  <a:srgbClr val="212529"/>
+                </a:solidFill>
+                <a:latin typeface="+mn-ea"/>
+              </a:rPr>
+              <a:t>]</a:t>
+            </a:r>
+            <a:r>
+              <a:rPr lang="en-US" altLang="ko-KR" sz="2800" dirty="0">
+                <a:solidFill>
+                  <a:srgbClr val="212529"/>
+                </a:solidFill>
+                <a:latin typeface="+mn-ea"/>
+              </a:rPr>
+              <a:t> </a:t>
+            </a:r>
+            <a:r>
+              <a:rPr lang="ko-KR" altLang="en-US" sz="2800" dirty="0">
+                <a:solidFill>
+                  <a:srgbClr val="212529"/>
+                </a:solidFill>
+                <a:latin typeface="+mn-ea"/>
+              </a:rPr>
+              <a:t>커리큘럼 클릭</a:t>
+            </a:r>
+            <a:endParaRPr lang="en-US" altLang="ko-KR" sz="2800" dirty="0">
+              <a:solidFill>
+                <a:srgbClr val="212529"/>
+              </a:solidFill>
+              <a:latin typeface="+mn-ea"/>
+            </a:endParaRPr>
+          </a:p>
+          <a:p>
+            <a:pPr lvl="1"/>
+            <a:r>
+              <a:rPr lang="ko-KR" altLang="en-US" sz="2800" b="1" dirty="0">
+                <a:solidFill>
+                  <a:srgbClr val="212529"/>
+                </a:solidFill>
+                <a:latin typeface="+mn-ea"/>
+              </a:rPr>
+              <a:t>➡ </a:t>
+            </a:r>
+            <a:r>
+              <a:rPr lang="en-US" altLang="ko-KR" sz="2800" b="1" dirty="0">
+                <a:solidFill>
+                  <a:schemeClr val="accent1"/>
+                </a:solidFill>
+                <a:latin typeface="+mn-ea"/>
+              </a:rPr>
+              <a:t>[</a:t>
+            </a:r>
+            <a:r>
+              <a:rPr lang="ko-KR" altLang="en-US" sz="2800" b="1" dirty="0" err="1">
+                <a:solidFill>
+                  <a:schemeClr val="accent1"/>
+                </a:solidFill>
+                <a:latin typeface="+mn-ea"/>
+              </a:rPr>
+              <a:t>형변환</a:t>
+            </a:r>
+            <a:r>
+              <a:rPr lang="ko-KR" altLang="en-US" sz="2800" b="1" dirty="0">
+                <a:solidFill>
+                  <a:schemeClr val="accent1"/>
+                </a:solidFill>
+                <a:latin typeface="+mn-ea"/>
+              </a:rPr>
               <a:t> 실습</a:t>
+            </a:r>
+            <a:r>
+              <a:rPr lang="en-US" altLang="ko-KR" sz="2800" b="1" dirty="0">
+                <a:solidFill>
+                  <a:schemeClr val="accent1"/>
+                </a:solidFill>
+                <a:latin typeface="+mn-ea"/>
+              </a:rPr>
+              <a:t>]</a:t>
+            </a:r>
+            <a:r>
+              <a:rPr lang="en-US" altLang="ko-KR" sz="2800" dirty="0">
+                <a:solidFill>
+                  <a:schemeClr val="accent1"/>
+                </a:solidFill>
+                <a:latin typeface="+mn-ea"/>
+              </a:rPr>
+              <a:t> </a:t>
+            </a:r>
+            <a:r>
+              <a:rPr lang="ko-KR" altLang="en-US" sz="2800" dirty="0">
+                <a:solidFill>
+                  <a:srgbClr val="212529"/>
+                </a:solidFill>
+                <a:latin typeface="+mn-ea"/>
+              </a:rPr>
+              <a:t> 진행</a:t>
             </a:r>
           </a:p>
         </p:txBody>
@@ -16056,7 +16761,7 @@
     </p:spTree>
     <p:extLst>
       <p:ext uri="{BB962C8B-B14F-4D97-AF65-F5344CB8AC3E}">
-        <p14:creationId xmlns:p14="http://schemas.microsoft.com/office/powerpoint/2010/main" val="3906620709"/>
+        <p14:creationId xmlns:p14="http://schemas.microsoft.com/office/powerpoint/2010/main" val="3023397714"/>
       </p:ext>
     </p:extLst>
   </p:cSld>

--- a/material/[SeSAC_YDP_6] 04_2_Javascript.pptx
+++ b/material/[SeSAC_YDP_6] 04_2_Javascript.pptx
@@ -233,7 +233,7 @@
           <a:p>
             <a:fld id="{2EF3F159-7250-4DD4-91C2-13B35D56E1AF}" type="datetimeFigureOut">
               <a:rPr lang="ko-KR" altLang="en-US" smtClean="0"/>
-              <a:t>2024-05-27</a:t>
+              <a:t>2024-05-29</a:t>
             </a:fld>
             <a:endParaRPr lang="ko-KR" altLang="en-US"/>
           </a:p>
@@ -748,10 +748,13 @@
               <a:t>여기까지 하고 코드 치고 다시 </a:t>
             </a:r>
             <a:r>
-              <a:rPr lang="ko-KR" altLang="en-US" dirty="0" err="1"/>
-              <a:t>ｐｐｔ로</a:t>
-            </a:r>
-            <a:endParaRPr lang="ko-KR" altLang="en-US" dirty="0"/>
+              <a:rPr lang="en-US" altLang="ko-KR" dirty="0"/>
+              <a:t>ppt</a:t>
+            </a:r>
+            <a:r>
+              <a:rPr lang="ko-KR" altLang="en-US" dirty="0"/>
+              <a:t>로</a:t>
+            </a:r>
           </a:p>
         </p:txBody>
       </p:sp>
@@ -2791,6 +2794,98 @@
     <p:extLst>
       <p:ext uri="{BB962C8B-B14F-4D97-AF65-F5344CB8AC3E}">
         <p14:creationId xmlns:p14="http://schemas.microsoft.com/office/powerpoint/2010/main" val="4218112008"/>
+      </p:ext>
+    </p:extLst>
+  </p:cSld>
+  <p:clrMapOvr>
+    <a:masterClrMapping/>
+  </p:clrMapOvr>
+</p:notes>
+</file>
+
+<file path=ppt/notesSlides/notesSlide29.xml><?xml version="1.0" encoding="utf-8"?>
+<p:notes xmlns:a="http://schemas.openxmlformats.org/drawingml/2006/main" xmlns:r="http://schemas.openxmlformats.org/officeDocument/2006/relationships" xmlns:p="http://schemas.openxmlformats.org/presentationml/2006/main">
+  <p:cSld>
+    <p:spTree>
+      <p:nvGrpSpPr>
+        <p:cNvPr id="1" name=""/>
+        <p:cNvGrpSpPr/>
+        <p:nvPr/>
+      </p:nvGrpSpPr>
+      <p:grpSpPr>
+        <a:xfrm>
+          <a:off x="0" y="0"/>
+          <a:ext cx="0" cy="0"/>
+          <a:chOff x="0" y="0"/>
+          <a:chExt cx="0" cy="0"/>
+        </a:xfrm>
+      </p:grpSpPr>
+      <p:sp>
+        <p:nvSpPr>
+          <p:cNvPr id="2" name="슬라이드 이미지 개체 틀 1"/>
+          <p:cNvSpPr>
+            <a:spLocks noGrp="1" noRot="1" noChangeAspect="1"/>
+          </p:cNvSpPr>
+          <p:nvPr>
+            <p:ph type="sldImg"/>
+          </p:nvPr>
+        </p:nvSpPr>
+        <p:spPr/>
+      </p:sp>
+      <p:sp>
+        <p:nvSpPr>
+          <p:cNvPr id="3" name="슬라이드 노트 개체 틀 2"/>
+          <p:cNvSpPr>
+            <a:spLocks noGrp="1"/>
+          </p:cNvSpPr>
+          <p:nvPr>
+            <p:ph type="body" idx="1"/>
+          </p:nvPr>
+        </p:nvSpPr>
+        <p:spPr/>
+        <p:txBody>
+          <a:bodyPr/>
+          <a:lstStyle/>
+          <a:p>
+            <a:r>
+              <a:rPr lang="ko-KR" altLang="en-US" dirty="0"/>
+              <a:t>코드 치러 가기</a:t>
+            </a:r>
+            <a:r>
+              <a:rPr lang="en-US" altLang="ko-KR"/>
+              <a:t>.</a:t>
+            </a:r>
+            <a:endParaRPr lang="ko-KR" altLang="en-US"/>
+          </a:p>
+        </p:txBody>
+      </p:sp>
+      <p:sp>
+        <p:nvSpPr>
+          <p:cNvPr id="4" name="슬라이드 번호 개체 틀 3"/>
+          <p:cNvSpPr>
+            <a:spLocks noGrp="1"/>
+          </p:cNvSpPr>
+          <p:nvPr>
+            <p:ph type="sldNum" sz="quarter" idx="5"/>
+          </p:nvPr>
+        </p:nvSpPr>
+        <p:spPr/>
+        <p:txBody>
+          <a:bodyPr/>
+          <a:lstStyle/>
+          <a:p>
+            <a:fld id="{C09E5BFC-1559-42F1-8940-AB342D56BF02}" type="slidenum">
+              <a:rPr lang="ko-KR" altLang="en-US" smtClean="0"/>
+              <a:t>34</a:t>
+            </a:fld>
+            <a:endParaRPr lang="ko-KR" altLang="en-US"/>
+          </a:p>
+        </p:txBody>
+      </p:sp>
+    </p:spTree>
+    <p:extLst>
+      <p:ext uri="{BB962C8B-B14F-4D97-AF65-F5344CB8AC3E}">
+        <p14:creationId xmlns:p14="http://schemas.microsoft.com/office/powerpoint/2010/main" val="156788362"/>
       </p:ext>
     </p:extLst>
   </p:cSld>
@@ -12158,7 +12253,7 @@
           <a:p>
             <a:fld id="{0F78D9C4-20C1-4B15-A116-16DC77AD9A1E}" type="datetime1">
               <a:rPr lang="ko-KR" altLang="en-US" smtClean="0"/>
-              <a:t>2024-05-27</a:t>
+              <a:t>2024-05-29</a:t>
             </a:fld>
             <a:endParaRPr lang="ko-KR" altLang="en-US"/>
           </a:p>
@@ -16255,7 +16350,7 @@
           <a:p>
             <a:fld id="{0F78D9C4-20C1-4B15-A116-16DC77AD9A1E}" type="datetime1">
               <a:rPr lang="ko-KR" altLang="en-US" smtClean="0"/>
-              <a:t>2024-05-27</a:t>
+              <a:t>2024-05-29</a:t>
             </a:fld>
             <a:endParaRPr lang="ko-KR" altLang="en-US"/>
           </a:p>
@@ -17000,7 +17095,7 @@
           <a:p>
             <a:fld id="{0F78D9C4-20C1-4B15-A116-16DC77AD9A1E}" type="datetime1">
               <a:rPr lang="ko-KR" altLang="en-US" smtClean="0"/>
-              <a:t>2024-05-27</a:t>
+              <a:t>2024-05-29</a:t>
             </a:fld>
             <a:endParaRPr lang="ko-KR" altLang="en-US"/>
           </a:p>
@@ -19234,7 +19329,7 @@
           <a:p>
             <a:fld id="{0F78D9C4-20C1-4B15-A116-16DC77AD9A1E}" type="datetime1">
               <a:rPr lang="ko-KR" altLang="en-US" smtClean="0"/>
-              <a:t>2024-05-27</a:t>
+              <a:t>2024-05-29</a:t>
             </a:fld>
             <a:endParaRPr lang="ko-KR" altLang="en-US"/>
           </a:p>

--- a/material/[SeSAC_YDP_6] 04_2_Javascript.pptx
+++ b/material/[SeSAC_YDP_6] 04_2_Javascript.pptx
@@ -233,7 +233,7 @@
           <a:p>
             <a:fld id="{2EF3F159-7250-4DD4-91C2-13B35D56E1AF}" type="datetimeFigureOut">
               <a:rPr lang="ko-KR" altLang="en-US" smtClean="0"/>
-              <a:t>2024-05-29</a:t>
+              <a:t>2024-11-27</a:t>
             </a:fld>
             <a:endParaRPr lang="ko-KR" altLang="en-US"/>
           </a:p>
@@ -933,9 +933,17 @@
               <a:rPr lang="ko-KR" altLang="en-US" dirty="0"/>
               <a:t>객체는 속성과 메서드로 구성되어 있음</a:t>
             </a:r>
+            <a:r>
+              <a:rPr lang="en-US" altLang="ko-KR" dirty="0"/>
+              <a:t/>
+            </a:r>
             <a:br>
               <a:rPr lang="en-US" altLang="ko-KR" dirty="0"/>
             </a:br>
+            <a:r>
+              <a:rPr lang="en-US" altLang="ko-KR" dirty="0"/>
+              <a:t/>
+            </a:r>
             <a:br>
               <a:rPr lang="en-US" altLang="ko-KR" dirty="0"/>
             </a:br>
@@ -3994,7 +4002,7 @@
           <a:p>
             <a:fld id="{0E19CB95-6D28-40F1-9DA3-1BAC5D4B5B4F}" type="datetime6">
               <a:rPr lang="ko-KR" altLang="en-US" smtClean="0"/>
-              <a:t>2024년 5월</a:t>
+              <a:t>2024년 11월</a:t>
             </a:fld>
             <a:endParaRPr lang="ko-KR" altLang="en-US"/>
           </a:p>
@@ -4124,7 +4132,7 @@
           <p:nvPr userDrawn="1"/>
         </p:nvPicPr>
         <p:blipFill>
-          <a:blip r:embed="rId2">
+          <a:blip r:embed="rId2" cstate="hqprint">
             <a:alphaModFix amt="20000"/>
             <a:extLst>
               <a:ext uri="{28A0092B-C50C-407E-A947-70E740481C1C}">
@@ -4374,7 +4382,7 @@
           <a:p>
             <a:fld id="{C4A39A32-5728-48B8-9F9C-437D214CCAF1}" type="datetime6">
               <a:rPr lang="ko-KR" altLang="en-US" smtClean="0"/>
-              <a:t>2024년 5월</a:t>
+              <a:t>2024년 11월</a:t>
             </a:fld>
             <a:endParaRPr lang="ko-KR" altLang="en-US"/>
           </a:p>
@@ -4576,7 +4584,7 @@
           <a:p>
             <a:fld id="{3BECC8BA-EBCB-4BF9-8E87-970CE0138376}" type="datetime6">
               <a:rPr lang="ko-KR" altLang="en-US" smtClean="0"/>
-              <a:t>2024년 5월</a:t>
+              <a:t>2024년 11월</a:t>
             </a:fld>
             <a:endParaRPr lang="ko-KR" altLang="en-US"/>
           </a:p>
@@ -4784,7 +4792,7 @@
           <a:p>
             <a:fld id="{7869FA6E-4699-4AC6-B2CB-4E60A58ED7A8}" type="datetime6">
               <a:rPr lang="ko-KR" altLang="en-US" smtClean="0"/>
-              <a:t>2024년 5월</a:t>
+              <a:t>2024년 11월</a:t>
             </a:fld>
             <a:endParaRPr lang="ko-KR" altLang="en-US"/>
           </a:p>
@@ -4897,7 +4905,7 @@
           <a:p>
             <a:fld id="{0E19CB95-6D28-40F1-9DA3-1BAC5D4B5B4F}" type="datetime6">
               <a:rPr lang="ko-KR" altLang="en-US" smtClean="0"/>
-              <a:t>2024년 5월</a:t>
+              <a:t>2024년 11월</a:t>
             </a:fld>
             <a:endParaRPr lang="ko-KR" altLang="en-US"/>
           </a:p>
@@ -5159,7 +5167,7 @@
           <a:p>
             <a:fld id="{3C9CE3CE-253F-4F9D-BA15-C226C8D8501E}" type="datetime6">
               <a:rPr lang="ko-KR" altLang="en-US" smtClean="0"/>
-              <a:t>2024년 5월</a:t>
+              <a:t>2024년 11월</a:t>
             </a:fld>
             <a:endParaRPr lang="ko-KR" altLang="en-US"/>
           </a:p>
@@ -5476,7 +5484,7 @@
           <a:p>
             <a:fld id="{BE5A7087-D460-46DD-B430-F8D9B9677D08}" type="datetime6">
               <a:rPr lang="ko-KR" altLang="en-US" smtClean="0"/>
-              <a:t>2024년 5월</a:t>
+              <a:t>2024년 11월</a:t>
             </a:fld>
             <a:endParaRPr lang="ko-KR" altLang="en-US"/>
           </a:p>
@@ -5745,7 +5753,7 @@
           <a:p>
             <a:fld id="{0581BA25-D675-4234-A003-8449BDEEF18E}" type="datetime6">
               <a:rPr lang="ko-KR" altLang="en-US" smtClean="0"/>
-              <a:t>2024년 5월</a:t>
+              <a:t>2024년 11월</a:t>
             </a:fld>
             <a:endParaRPr lang="ko-KR" altLang="en-US"/>
           </a:p>
@@ -6161,7 +6169,7 @@
           <a:p>
             <a:fld id="{26155C29-A87F-46F0-A24C-6C9F0A4BF6AA}" type="datetime6">
               <a:rPr lang="ko-KR" altLang="en-US" smtClean="0"/>
-              <a:t>2024년 5월</a:t>
+              <a:t>2024년 11월</a:t>
             </a:fld>
             <a:endParaRPr lang="ko-KR" altLang="en-US"/>
           </a:p>
@@ -6306,7 +6314,7 @@
           <a:p>
             <a:fld id="{DD2EDD62-8757-43DB-BAE0-460422B548EA}" type="datetime6">
               <a:rPr lang="ko-KR" altLang="en-US" smtClean="0"/>
-              <a:t>2024년 5월</a:t>
+              <a:t>2024년 11월</a:t>
             </a:fld>
             <a:endParaRPr lang="ko-KR" altLang="en-US"/>
           </a:p>
@@ -6419,7 +6427,7 @@
           <a:p>
             <a:fld id="{DC6A871B-4800-495F-AC75-93D44C7DEBA5}" type="datetime6">
               <a:rPr lang="ko-KR" altLang="en-US" smtClean="0"/>
-              <a:t>2024년 5월</a:t>
+              <a:t>2024년 11월</a:t>
             </a:fld>
             <a:endParaRPr lang="ko-KR" altLang="en-US"/>
           </a:p>
@@ -6730,7 +6738,7 @@
           <a:p>
             <a:fld id="{59605888-30A6-49BB-95E2-DEAE4E5B09E9}" type="datetime6">
               <a:rPr lang="ko-KR" altLang="en-US" smtClean="0"/>
-              <a:t>2024년 5월</a:t>
+              <a:t>2024년 11월</a:t>
             </a:fld>
             <a:endParaRPr lang="ko-KR" altLang="en-US"/>
           </a:p>
@@ -6971,7 +6979,7 @@
           <a:p>
             <a:fld id="{8691C14A-5735-4A8B-B68B-DEC1DC2A3813}" type="datetime6">
               <a:rPr lang="ko-KR" altLang="en-US" smtClean="0"/>
-              <a:t>2024년 5월</a:t>
+              <a:t>2024년 11월</a:t>
             </a:fld>
             <a:endParaRPr lang="ko-KR" altLang="en-US"/>
           </a:p>
@@ -7136,7 +7144,7 @@
           <p:nvPr userDrawn="1"/>
         </p:nvPicPr>
         <p:blipFill>
-          <a:blip r:embed="rId14">
+          <a:blip r:embed="rId14" cstate="hqprint">
             <a:extLst>
               <a:ext uri="{28A0092B-C50C-407E-A947-70E740481C1C}">
                 <a14:useLocalDpi xmlns:a14="http://schemas.microsoft.com/office/drawing/2010/main" val="0"/>
@@ -7542,7 +7550,7 @@
           <a:p>
             <a:fld id="{0E19CB95-6D28-40F1-9DA3-1BAC5D4B5B4F}" type="datetime6">
               <a:rPr lang="ko-KR" altLang="en-US" smtClean="0"/>
-              <a:t>2024년 5월</a:t>
+              <a:t>2024년 11월</a:t>
             </a:fld>
             <a:endParaRPr lang="ko-KR" altLang="en-US"/>
           </a:p>
@@ -7618,7 +7626,7 @@
           <a:p>
             <a:fld id="{3C9CE3CE-253F-4F9D-BA15-C226C8D8501E}" type="datetime6">
               <a:rPr lang="ko-KR" altLang="en-US" smtClean="0"/>
-              <a:t>2024년 5월</a:t>
+              <a:t>2024년 11월</a:t>
             </a:fld>
             <a:endParaRPr lang="ko-KR" altLang="en-US"/>
           </a:p>
@@ -7917,6 +7925,17 @@
             </a:r>
           </a:p>
           <a:p>
+            <a:r>
+              <a:rPr lang="en-US" altLang="ko-KR" b="0" dirty="0">
+                <a:solidFill>
+                  <a:srgbClr val="D4D4D4"/>
+                </a:solidFill>
+                <a:effectLst/>
+                <a:latin typeface="Consolas" panose="020B0609020204030204" pitchFamily="49" charset="0"/>
+                <a:ea typeface="Kim jung chul Gothic Regular" panose="020B0503000000000000" pitchFamily="34" charset="-127"/>
+              </a:rPr>
+              <a:t/>
+            </a:r>
             <a:br>
               <a:rPr lang="en-US" altLang="ko-KR" b="0" dirty="0">
                 <a:solidFill>
@@ -8160,7 +8179,7 @@
           <a:p>
             <a:fld id="{3C9CE3CE-253F-4F9D-BA15-C226C8D8501E}" type="datetime6">
               <a:rPr lang="ko-KR" altLang="en-US" smtClean="0"/>
-              <a:t>2024년 5월</a:t>
+              <a:t>2024년 11월</a:t>
             </a:fld>
             <a:endParaRPr lang="ko-KR" altLang="en-US"/>
           </a:p>
@@ -8489,6 +8508,17 @@
             </a:r>
           </a:p>
           <a:p>
+            <a:r>
+              <a:rPr lang="en-US" altLang="ko-KR" b="0" dirty="0">
+                <a:solidFill>
+                  <a:srgbClr val="D4D4D4"/>
+                </a:solidFill>
+                <a:effectLst/>
+                <a:latin typeface="Consolas" panose="020B0609020204030204" pitchFamily="49" charset="0"/>
+                <a:ea typeface="Kim jung chul Gothic Regular" panose="020B0503000000000000" pitchFamily="34" charset="-127"/>
+              </a:rPr>
+              <a:t/>
+            </a:r>
             <a:br>
               <a:rPr lang="en-US" altLang="ko-KR" b="0" dirty="0">
                 <a:solidFill>
@@ -8724,7 +8754,7 @@
           <a:p>
             <a:fld id="{3C9CE3CE-253F-4F9D-BA15-C226C8D8501E}" type="datetime6">
               <a:rPr lang="ko-KR" altLang="en-US" smtClean="0"/>
-              <a:t>2024년 5월</a:t>
+              <a:t>2024년 11월</a:t>
             </a:fld>
             <a:endParaRPr lang="ko-KR" altLang="en-US"/>
           </a:p>
@@ -9064,6 +9094,17 @@
             </a:r>
           </a:p>
           <a:p>
+            <a:r>
+              <a:rPr lang="en-US" altLang="ko-KR" b="0" dirty="0">
+                <a:solidFill>
+                  <a:srgbClr val="D4D4D4"/>
+                </a:solidFill>
+                <a:effectLst/>
+                <a:latin typeface="Consolas" panose="020B0609020204030204" pitchFamily="49" charset="0"/>
+                <a:ea typeface="Kim jung chul Gothic Regular" panose="020B0503000000000000" pitchFamily="34" charset="-127"/>
+              </a:rPr>
+              <a:t/>
+            </a:r>
             <a:br>
               <a:rPr lang="en-US" altLang="ko-KR" b="0" dirty="0">
                 <a:solidFill>
@@ -9411,7 +9452,7 @@
           <a:p>
             <a:fld id="{3C9CE3CE-253F-4F9D-BA15-C226C8D8501E}" type="datetime6">
               <a:rPr lang="ko-KR" altLang="en-US" smtClean="0"/>
-              <a:t>2024년 5월</a:t>
+              <a:t>2024년 11월</a:t>
             </a:fld>
             <a:endParaRPr lang="ko-KR" altLang="en-US"/>
           </a:p>
@@ -9694,6 +9735,17 @@
             </a:r>
           </a:p>
           <a:p>
+            <a:r>
+              <a:rPr lang="en-US" altLang="ko-KR" b="0" dirty="0">
+                <a:solidFill>
+                  <a:srgbClr val="D4D4D4"/>
+                </a:solidFill>
+                <a:effectLst/>
+                <a:latin typeface="Consolas" panose="020B0609020204030204" pitchFamily="49" charset="0"/>
+                <a:ea typeface="Kim jung chul Gothic Regular" panose="020B0503000000000000" pitchFamily="34" charset="-127"/>
+              </a:rPr>
+              <a:t/>
+            </a:r>
             <a:br>
               <a:rPr lang="en-US" altLang="ko-KR" b="0" dirty="0">
                 <a:solidFill>
@@ -9867,7 +9919,7 @@
           <a:p>
             <a:fld id="{0E19CB95-6D28-40F1-9DA3-1BAC5D4B5B4F}" type="datetime6">
               <a:rPr lang="ko-KR" altLang="en-US" smtClean="0"/>
-              <a:t>2024년 5월</a:t>
+              <a:t>2024년 11월</a:t>
             </a:fld>
             <a:endParaRPr lang="ko-KR" altLang="en-US"/>
           </a:p>
@@ -9926,6 +9978,10 @@
             <a:r>
               <a:rPr lang="ko-KR" altLang="en-US" dirty="0"/>
               <a:t>배열</a:t>
+            </a:r>
+            <a:r>
+              <a:rPr lang="en-US" altLang="ko-KR" dirty="0"/>
+              <a:t/>
             </a:r>
             <a:br>
               <a:rPr lang="en-US" altLang="ko-KR" dirty="0"/>
@@ -10012,7 +10068,7 @@
           <a:p>
             <a:fld id="{3C9CE3CE-253F-4F9D-BA15-C226C8D8501E}" type="datetime6">
               <a:rPr lang="ko-KR" altLang="en-US" smtClean="0"/>
-              <a:t>2024년 5월</a:t>
+              <a:t>2024년 11월</a:t>
             </a:fld>
             <a:endParaRPr lang="ko-KR" altLang="en-US"/>
           </a:p>
@@ -10329,6 +10385,17 @@
             </a:r>
           </a:p>
           <a:p>
+            <a:r>
+              <a:rPr lang="en-US" altLang="ko-KR" b="0" dirty="0">
+                <a:solidFill>
+                  <a:srgbClr val="D4D4D4"/>
+                </a:solidFill>
+                <a:effectLst/>
+                <a:latin typeface="Consolas" panose="020B0609020204030204" pitchFamily="49" charset="0"/>
+                <a:ea typeface="Kim jung chul Gothic Regular" panose="020B0503000000000000" pitchFamily="34" charset="-127"/>
+              </a:rPr>
+              <a:t/>
+            </a:r>
             <a:br>
               <a:rPr lang="en-US" altLang="ko-KR" b="0" dirty="0">
                 <a:solidFill>
@@ -10771,6 +10838,17 @@
             </a:r>
           </a:p>
           <a:p>
+            <a:r>
+              <a:rPr lang="it-IT" altLang="ko-KR" b="1" dirty="0">
+                <a:solidFill>
+                  <a:srgbClr val="D4D4D4"/>
+                </a:solidFill>
+                <a:effectLst/>
+                <a:latin typeface="Consolas" panose="020B0609020204030204" pitchFamily="49" charset="0"/>
+                <a:ea typeface="Kim jung chul Gothic Regular" panose="020B0503000000000000" pitchFamily="34" charset="-127"/>
+              </a:rPr>
+              <a:t/>
+            </a:r>
             <a:br>
               <a:rPr lang="it-IT" altLang="ko-KR" b="1" dirty="0">
                 <a:solidFill>
@@ -11170,7 +11248,7 @@
           <a:p>
             <a:fld id="{0E19CB95-6D28-40F1-9DA3-1BAC5D4B5B4F}" type="datetime6">
               <a:rPr lang="ko-KR" altLang="en-US" smtClean="0"/>
-              <a:t>2024년 5월</a:t>
+              <a:t>2024년 11월</a:t>
             </a:fld>
             <a:endParaRPr lang="ko-KR" altLang="en-US"/>
           </a:p>
@@ -11229,6 +11307,10 @@
             <a:r>
               <a:rPr lang="ko-KR" altLang="en-US" dirty="0"/>
               <a:t>객체</a:t>
+            </a:r>
+            <a:r>
+              <a:rPr lang="en-US" altLang="ko-KR" dirty="0"/>
+              <a:t/>
             </a:r>
             <a:br>
               <a:rPr lang="en-US" altLang="ko-KR" dirty="0"/>
@@ -11314,7 +11396,7 @@
           <a:p>
             <a:fld id="{3C9CE3CE-253F-4F9D-BA15-C226C8D8501E}" type="datetime6">
               <a:rPr lang="ko-KR" altLang="en-US" smtClean="0"/>
-              <a:t>2024년 5월</a:t>
+              <a:t>2024년 11월</a:t>
             </a:fld>
             <a:endParaRPr lang="ko-KR" altLang="en-US"/>
           </a:p>
@@ -12253,7 +12335,7 @@
           <a:p>
             <a:fld id="{0F78D9C4-20C1-4B15-A116-16DC77AD9A1E}" type="datetime1">
               <a:rPr lang="ko-KR" altLang="en-US" smtClean="0"/>
-              <a:t>2024-05-29</a:t>
+              <a:t>2024-11-27</a:t>
             </a:fld>
             <a:endParaRPr lang="ko-KR" altLang="en-US"/>
           </a:p>
@@ -12609,6 +12691,15 @@
                 <a:latin typeface="+mn-ea"/>
               </a:rPr>
               <a:t>강의 클릭</a:t>
+            </a:r>
+            <a:r>
+              <a:rPr lang="en-US" altLang="ko-KR" dirty="0">
+                <a:solidFill>
+                  <a:srgbClr val="212529"/>
+                </a:solidFill>
+                <a:latin typeface="+mn-ea"/>
+              </a:rPr>
+              <a:t/>
             </a:r>
             <a:br>
               <a:rPr lang="en-US" altLang="ko-KR" dirty="0">
@@ -12803,7 +12894,7 @@
           <a:p>
             <a:fld id="{0E19CB95-6D28-40F1-9DA3-1BAC5D4B5B4F}" type="datetime6">
               <a:rPr lang="ko-KR" altLang="en-US" smtClean="0"/>
-              <a:t>2024년 5월</a:t>
+              <a:t>2024년 11월</a:t>
             </a:fld>
             <a:endParaRPr lang="ko-KR" altLang="en-US"/>
           </a:p>
@@ -12902,7 +12993,7 @@
           <a:p>
             <a:fld id="{0E19CB95-6D28-40F1-9DA3-1BAC5D4B5B4F}" type="datetime6">
               <a:rPr lang="ko-KR" altLang="en-US" smtClean="0"/>
-              <a:t>2024년 5월</a:t>
+              <a:t>2024년 11월</a:t>
             </a:fld>
             <a:endParaRPr lang="ko-KR" altLang="en-US"/>
           </a:p>
@@ -13044,7 +13135,7 @@
           <a:p>
             <a:fld id="{3C9CE3CE-253F-4F9D-BA15-C226C8D8501E}" type="datetime6">
               <a:rPr lang="ko-KR" altLang="en-US" smtClean="0"/>
-              <a:t>2024년 5월</a:t>
+              <a:t>2024년 11월</a:t>
             </a:fld>
             <a:endParaRPr lang="ko-KR" altLang="en-US"/>
           </a:p>
@@ -13670,7 +13761,7 @@
             <a:fld id="{A00B65A2-CFCD-47FB-B251-07B23B5E1093}" type="datetime6">
               <a:rPr lang="ko-KR" altLang="en-US" smtClean="0"/>
               <a:pPr/>
-              <a:t>2024년 5월</a:t>
+              <a:t>2024년 11월</a:t>
             </a:fld>
             <a:endParaRPr lang="ko-KR" altLang="en-US"/>
           </a:p>
@@ -13810,7 +13901,7 @@
           <a:p>
             <a:fld id="{0E19CB95-6D28-40F1-9DA3-1BAC5D4B5B4F}" type="datetime6">
               <a:rPr lang="ko-KR" altLang="en-US" smtClean="0"/>
-              <a:t>2024년 5월</a:t>
+              <a:t>2024년 11월</a:t>
             </a:fld>
             <a:endParaRPr lang="ko-KR" altLang="en-US"/>
           </a:p>
@@ -13978,7 +14069,7 @@
           <a:p>
             <a:fld id="{3C9CE3CE-253F-4F9D-BA15-C226C8D8501E}" type="datetime6">
               <a:rPr lang="ko-KR" altLang="en-US" smtClean="0"/>
-              <a:t>2024년 5월</a:t>
+              <a:t>2024년 11월</a:t>
             </a:fld>
             <a:endParaRPr lang="ko-KR" altLang="en-US"/>
           </a:p>
@@ -14330,7 +14421,7 @@
           <a:p>
             <a:fld id="{3C9CE3CE-253F-4F9D-BA15-C226C8D8501E}" type="datetime6">
               <a:rPr lang="ko-KR" altLang="en-US" smtClean="0"/>
-              <a:t>2024년 5월</a:t>
+              <a:t>2024년 11월</a:t>
             </a:fld>
             <a:endParaRPr lang="ko-KR" altLang="en-US"/>
           </a:p>
@@ -14609,7 +14700,7 @@
           <a:p>
             <a:fld id="{3C9CE3CE-253F-4F9D-BA15-C226C8D8501E}" type="datetime6">
               <a:rPr lang="ko-KR" altLang="en-US" smtClean="0"/>
-              <a:t>2024년 5월</a:t>
+              <a:t>2024년 11월</a:t>
             </a:fld>
             <a:endParaRPr lang="ko-KR" altLang="en-US"/>
           </a:p>
@@ -14857,7 +14948,7 @@
           <a:p>
             <a:fld id="{3C9CE3CE-253F-4F9D-BA15-C226C8D8501E}" type="datetime6">
               <a:rPr lang="ko-KR" altLang="en-US" smtClean="0"/>
-              <a:t>2024년 5월</a:t>
+              <a:t>2024년 11월</a:t>
             </a:fld>
             <a:endParaRPr lang="ko-KR" altLang="en-US"/>
           </a:p>
@@ -15216,6 +15307,17 @@
             </a:r>
           </a:p>
           <a:p>
+            <a:r>
+              <a:rPr lang="en-US" altLang="ko-KR" b="0" dirty="0">
+                <a:solidFill>
+                  <a:srgbClr val="D4D4D4"/>
+                </a:solidFill>
+                <a:effectLst/>
+                <a:latin typeface="Consolas" panose="020B0609020204030204" pitchFamily="49" charset="0"/>
+                <a:ea typeface="Kim jung chul Gothic Regular" panose="020B0503000000000000" pitchFamily="34" charset="-127"/>
+              </a:rPr>
+              <a:t/>
+            </a:r>
             <a:br>
               <a:rPr lang="en-US" altLang="ko-KR" b="0" dirty="0">
                 <a:solidFill>
@@ -15779,7 +15881,7 @@
             <a:fld id="{A00B65A2-CFCD-47FB-B251-07B23B5E1093}" type="datetime6">
               <a:rPr lang="ko-KR" altLang="en-US" smtClean="0"/>
               <a:pPr/>
-              <a:t>2024년 5월</a:t>
+              <a:t>2024년 11월</a:t>
             </a:fld>
             <a:endParaRPr lang="ko-KR" altLang="en-US"/>
           </a:p>
@@ -16126,7 +16228,7 @@
             <a:fld id="{A00B65A2-CFCD-47FB-B251-07B23B5E1093}" type="datetime6">
               <a:rPr lang="ko-KR" altLang="en-US" smtClean="0"/>
               <a:pPr/>
-              <a:t>2024년 5월</a:t>
+              <a:t>2024년 11월</a:t>
             </a:fld>
             <a:endParaRPr lang="ko-KR" altLang="en-US"/>
           </a:p>
@@ -16350,7 +16452,7 @@
           <a:p>
             <a:fld id="{0F78D9C4-20C1-4B15-A116-16DC77AD9A1E}" type="datetime1">
               <a:rPr lang="ko-KR" altLang="en-US" smtClean="0"/>
-              <a:t>2024-05-29</a:t>
+              <a:t>2024-11-27</a:t>
             </a:fld>
             <a:endParaRPr lang="ko-KR" altLang="en-US"/>
           </a:p>
@@ -16706,6 +16808,15 @@
                 <a:latin typeface="+mn-ea"/>
               </a:rPr>
               <a:t>강의 클릭</a:t>
+            </a:r>
+            <a:r>
+              <a:rPr lang="en-US" altLang="ko-KR" dirty="0">
+                <a:solidFill>
+                  <a:srgbClr val="212529"/>
+                </a:solidFill>
+                <a:latin typeface="+mn-ea"/>
+              </a:rPr>
+              <a:t/>
             </a:r>
             <a:br>
               <a:rPr lang="en-US" altLang="ko-KR" dirty="0">
@@ -17095,7 +17206,7 @@
           <a:p>
             <a:fld id="{0F78D9C4-20C1-4B15-A116-16DC77AD9A1E}" type="datetime1">
               <a:rPr lang="ko-KR" altLang="en-US" smtClean="0"/>
-              <a:t>2024-05-29</a:t>
+              <a:t>2024-11-27</a:t>
             </a:fld>
             <a:endParaRPr lang="ko-KR" altLang="en-US"/>
           </a:p>
@@ -17312,7 +17423,7 @@
             <a:fld id="{A00B65A2-CFCD-47FB-B251-07B23B5E1093}" type="datetime6">
               <a:rPr lang="ko-KR" altLang="en-US" smtClean="0"/>
               <a:pPr/>
-              <a:t>2024년 5월</a:t>
+              <a:t>2024년 11월</a:t>
             </a:fld>
             <a:endParaRPr lang="ko-KR" altLang="en-US"/>
           </a:p>
@@ -17724,7 +17835,7 @@
             <a:fld id="{A00B65A2-CFCD-47FB-B251-07B23B5E1093}" type="datetime6">
               <a:rPr lang="ko-KR" altLang="en-US" smtClean="0"/>
               <a:pPr/>
-              <a:t>2024년 5월</a:t>
+              <a:t>2024년 11월</a:t>
             </a:fld>
             <a:endParaRPr lang="ko-KR" altLang="en-US" dirty="0"/>
           </a:p>
@@ -18333,7 +18444,7 @@
           <a:p>
             <a:fld id="{3C9CE3CE-253F-4F9D-BA15-C226C8D8501E}" type="datetime6">
               <a:rPr lang="ko-KR" altLang="en-US" smtClean="0"/>
-              <a:t>2024년 5월</a:t>
+              <a:t>2024년 11월</a:t>
             </a:fld>
             <a:endParaRPr lang="ko-KR" altLang="en-US"/>
           </a:p>
@@ -18489,7 +18600,7 @@
           <a:p>
             <a:fld id="{3C9CE3CE-253F-4F9D-BA15-C226C8D8501E}" type="datetime6">
               <a:rPr lang="ko-KR" altLang="en-US" smtClean="0"/>
-              <a:t>2024년 5월</a:t>
+              <a:t>2024년 11월</a:t>
             </a:fld>
             <a:endParaRPr lang="ko-KR" altLang="en-US"/>
           </a:p>
@@ -18773,6 +18884,17 @@
             </a:r>
           </a:p>
           <a:p>
+            <a:r>
+              <a:rPr lang="pt-BR" altLang="ko-KR" b="0" dirty="0">
+                <a:solidFill>
+                  <a:srgbClr val="D4D4D4"/>
+                </a:solidFill>
+                <a:effectLst/>
+                <a:latin typeface="Consolas" panose="020B0609020204030204" pitchFamily="49" charset="0"/>
+                <a:ea typeface="Kim jung chul Gothic Regular" panose="020B0503000000000000" pitchFamily="34" charset="-127"/>
+              </a:rPr>
+              <a:t/>
+            </a:r>
             <a:br>
               <a:rPr lang="pt-BR" altLang="ko-KR" b="0" dirty="0">
                 <a:solidFill>
@@ -18897,6 +19019,17 @@
             </a:r>
           </a:p>
           <a:p>
+            <a:r>
+              <a:rPr lang="pt-BR" altLang="ko-KR" b="0" dirty="0">
+                <a:solidFill>
+                  <a:srgbClr val="D4D4D4"/>
+                </a:solidFill>
+                <a:effectLst/>
+                <a:latin typeface="Consolas" panose="020B0609020204030204" pitchFamily="49" charset="0"/>
+                <a:ea typeface="Kim jung chul Gothic Regular" panose="020B0503000000000000" pitchFamily="34" charset="-127"/>
+              </a:rPr>
+              <a:t/>
+            </a:r>
             <a:br>
               <a:rPr lang="pt-BR" altLang="ko-KR" b="0" dirty="0">
                 <a:solidFill>
@@ -19213,7 +19346,7 @@
           <a:p>
             <a:fld id="{3C9CE3CE-253F-4F9D-BA15-C226C8D8501E}" type="datetime6">
               <a:rPr lang="ko-KR" altLang="en-US" smtClean="0"/>
-              <a:t>2024년 5월</a:t>
+              <a:t>2024년 11월</a:t>
             </a:fld>
             <a:endParaRPr lang="ko-KR" altLang="en-US"/>
           </a:p>
@@ -19329,7 +19462,7 @@
           <a:p>
             <a:fld id="{0F78D9C4-20C1-4B15-A116-16DC77AD9A1E}" type="datetime1">
               <a:rPr lang="ko-KR" altLang="en-US" smtClean="0"/>
-              <a:t>2024-05-29</a:t>
+              <a:t>2024-11-27</a:t>
             </a:fld>
             <a:endParaRPr lang="ko-KR" altLang="en-US"/>
           </a:p>
@@ -19576,7 +19709,7 @@
             <a:fld id="{A00B65A2-CFCD-47FB-B251-07B23B5E1093}" type="datetime6">
               <a:rPr lang="ko-KR" altLang="en-US" smtClean="0"/>
               <a:pPr/>
-              <a:t>2024년 5월</a:t>
+              <a:t>2024년 11월</a:t>
             </a:fld>
             <a:endParaRPr lang="ko-KR" altLang="en-US" dirty="0"/>
           </a:p>
@@ -20087,7 +20220,7 @@
             <a:fld id="{A00B65A2-CFCD-47FB-B251-07B23B5E1093}" type="datetime6">
               <a:rPr lang="ko-KR" altLang="en-US" smtClean="0"/>
               <a:pPr/>
-              <a:t>2024년 5월</a:t>
+              <a:t>2024년 11월</a:t>
             </a:fld>
             <a:endParaRPr lang="ko-KR" altLang="en-US"/>
           </a:p>
@@ -20412,7 +20545,7 @@
             <a:fld id="{A00B65A2-CFCD-47FB-B251-07B23B5E1093}" type="datetime6">
               <a:rPr lang="ko-KR" altLang="en-US" smtClean="0"/>
               <a:pPr/>
-              <a:t>2024년 5월</a:t>
+              <a:t>2024년 11월</a:t>
             </a:fld>
             <a:endParaRPr lang="ko-KR" altLang="en-US" dirty="0"/>
           </a:p>
@@ -20984,7 +21117,7 @@
           <a:p>
             <a:fld id="{3C9CE3CE-253F-4F9D-BA15-C226C8D8501E}" type="datetime6">
               <a:rPr lang="ko-KR" altLang="en-US" smtClean="0"/>
-              <a:t>2024년 5월</a:t>
+              <a:t>2024년 11월</a:t>
             </a:fld>
             <a:endParaRPr lang="ko-KR" altLang="en-US"/>
           </a:p>
@@ -21368,7 +21501,7 @@
           <a:p>
             <a:fld id="{3C9CE3CE-253F-4F9D-BA15-C226C8D8501E}" type="datetime6">
               <a:rPr lang="ko-KR" altLang="en-US" smtClean="0"/>
-              <a:t>2024년 5월</a:t>
+              <a:t>2024년 11월</a:t>
             </a:fld>
             <a:endParaRPr lang="ko-KR" altLang="en-US"/>
           </a:p>
